--- a/MDM_Presentation.pptx
+++ b/MDM_Presentation.pptx
@@ -220,7 +220,7 @@
           <a:p>
             <a:fld id="{9F7C20B7-65B1-460B-9FEE-5B0E7D618511}" type="datetimeFigureOut">
               <a:rPr lang="ru-RU" smtClean="0"/>
-              <a:t>09.06.2026</a:t>
+              <a:t>10.06.2026</a:t>
             </a:fld>
             <a:endParaRPr lang="ru-RU"/>
           </a:p>
@@ -386,7 +386,7 @@
           <a:p>
             <a:fld id="{48FB0FC7-068E-4198-9ADE-2070298BD956}" type="datetimeFigureOut">
               <a:rPr lang="ru-RU" smtClean="0"/>
-              <a:t>09.06.2026</a:t>
+              <a:t>10.06.2026</a:t>
             </a:fld>
             <a:endParaRPr lang="ru-RU"/>
           </a:p>
@@ -1088,7 +1088,7 @@
           <a:p>
             <a:fld id="{6A2972AD-20FE-43AA-9C78-53494498DE8A}" type="datetime1">
               <a:rPr lang="en-US" smtClean="0"/>
-              <a:t>6/9/2026</a:t>
+              <a:t>6/10/2026</a:t>
             </a:fld>
             <a:endParaRPr lang="en-US"/>
           </a:p>
@@ -1258,7 +1258,7 @@
           <a:p>
             <a:fld id="{6D535A7E-F911-4762-A529-EDE1948DF7DC}" type="datetime1">
               <a:rPr lang="en-US" smtClean="0"/>
-              <a:t>6/9/2026</a:t>
+              <a:t>6/10/2026</a:t>
             </a:fld>
             <a:endParaRPr lang="en-US"/>
           </a:p>
@@ -1438,7 +1438,7 @@
           <a:p>
             <a:fld id="{3B752D17-B5C5-465B-8912-02E04564B17C}" type="datetime1">
               <a:rPr lang="en-US" smtClean="0"/>
-              <a:t>6/9/2026</a:t>
+              <a:t>6/10/2026</a:t>
             </a:fld>
             <a:endParaRPr lang="en-US"/>
           </a:p>
@@ -1608,7 +1608,7 @@
           <a:p>
             <a:fld id="{1FA231C6-6893-4E74-B789-E2831F6B965F}" type="datetime1">
               <a:rPr lang="en-US" smtClean="0"/>
-              <a:t>6/9/2026</a:t>
+              <a:t>6/10/2026</a:t>
             </a:fld>
             <a:endParaRPr lang="en-US"/>
           </a:p>
@@ -1854,7 +1854,7 @@
           <a:p>
             <a:fld id="{BCD87231-6B9B-4656-8857-B3B03AA9A637}" type="datetime1">
               <a:rPr lang="en-US" smtClean="0"/>
-              <a:t>6/9/2026</a:t>
+              <a:t>6/10/2026</a:t>
             </a:fld>
             <a:endParaRPr lang="en-US"/>
           </a:p>
@@ -2142,7 +2142,7 @@
           <a:p>
             <a:fld id="{A6FA9EE2-41C8-4E90-979A-05990CE929A6}" type="datetime1">
               <a:rPr lang="en-US" smtClean="0"/>
-              <a:t>6/9/2026</a:t>
+              <a:t>6/10/2026</a:t>
             </a:fld>
             <a:endParaRPr lang="en-US"/>
           </a:p>
@@ -2564,7 +2564,7 @@
           <a:p>
             <a:fld id="{EEDE510C-3D7D-4754-BCDC-41DD58F635CA}" type="datetime1">
               <a:rPr lang="en-US" smtClean="0"/>
-              <a:t>6/9/2026</a:t>
+              <a:t>6/10/2026</a:t>
             </a:fld>
             <a:endParaRPr lang="en-US"/>
           </a:p>
@@ -2682,7 +2682,7 @@
           <a:p>
             <a:fld id="{5B7823D1-ECF2-4BE9-AF1B-1EFD672B16F0}" type="datetime1">
               <a:rPr lang="en-US" smtClean="0"/>
-              <a:t>6/9/2026</a:t>
+              <a:t>6/10/2026</a:t>
             </a:fld>
             <a:endParaRPr lang="en-US"/>
           </a:p>
@@ -2777,7 +2777,7 @@
           <a:p>
             <a:fld id="{E7B2D30A-ED29-4ED4-8268-9B55AAC3476B}" type="datetime1">
               <a:rPr lang="en-US" smtClean="0"/>
-              <a:t>6/9/2026</a:t>
+              <a:t>6/10/2026</a:t>
             </a:fld>
             <a:endParaRPr lang="en-US"/>
           </a:p>
@@ -3054,7 +3054,7 @@
           <a:p>
             <a:fld id="{0E09F19A-EB7E-456C-B989-89FCD8894EB3}" type="datetime1">
               <a:rPr lang="en-US" smtClean="0"/>
-              <a:t>6/9/2026</a:t>
+              <a:t>6/10/2026</a:t>
             </a:fld>
             <a:endParaRPr lang="en-US"/>
           </a:p>
@@ -3307,7 +3307,7 @@
           <a:p>
             <a:fld id="{C5978BCD-C78A-490D-9C69-D3C3A46B44E0}" type="datetime1">
               <a:rPr lang="en-US" smtClean="0"/>
-              <a:t>6/9/2026</a:t>
+              <a:t>6/10/2026</a:t>
             </a:fld>
             <a:endParaRPr lang="en-US"/>
           </a:p>
@@ -3520,7 +3520,7 @@
           <a:p>
             <a:fld id="{A2EE3416-0122-4AB3-B70B-0CC565A2D040}" type="datetime1">
               <a:rPr lang="en-US" smtClean="0"/>
-              <a:t>6/9/2026</a:t>
+              <a:t>6/10/2026</a:t>
             </a:fld>
             <a:endParaRPr lang="en-US"/>
           </a:p>
@@ -4628,9 +4628,59 @@
           </a:p>
         </p:txBody>
       </p:sp>
+      <p:sp>
+        <p:nvSpPr>
+          <p:cNvPr id="6" name="Прямоугольник 5"/>
+          <p:cNvSpPr/>
+          <p:nvPr/>
+        </p:nvSpPr>
+        <p:spPr>
+          <a:xfrm>
+            <a:off x="11274007" y="6366476"/>
+            <a:ext cx="819455" cy="369332"/>
+          </a:xfrm>
+          <a:prstGeom prst="rect">
+            <a:avLst/>
+          </a:prstGeom>
+        </p:spPr>
+        <p:txBody>
+          <a:bodyPr wrap="none">
+            <a:spAutoFit/>
+          </a:bodyPr>
+          <a:lstStyle/>
+          <a:p>
+            <a:fld id="{C1FF6DA9-008F-8B48-92A6-B652298478BF}" type="slidenum">
+              <a:rPr lang="en-US" b="1" smtClean="0">
+                <a:latin typeface="Segoe UI" panose="020B0502040204020203" pitchFamily="34" charset="0"/>
+                <a:cs typeface="Segoe UI" panose="020B0502040204020203" pitchFamily="34" charset="0"/>
+              </a:rPr>
+              <a:pPr/>
+              <a:t>10</a:t>
+            </a:fld>
+            <a:r>
+              <a:rPr lang="en-US" b="1" dirty="0" smtClean="0">
+                <a:latin typeface="Segoe UI" panose="020B0502040204020203" pitchFamily="34" charset="0"/>
+                <a:cs typeface="Segoe UI" panose="020B0502040204020203" pitchFamily="34" charset="0"/>
+              </a:rPr>
+              <a:t>/2</a:t>
+            </a:r>
+            <a:r>
+              <a:rPr lang="ru-RU" b="1" dirty="0" smtClean="0">
+                <a:latin typeface="Segoe UI" panose="020B0502040204020203" pitchFamily="34" charset="0"/>
+                <a:cs typeface="Segoe UI" panose="020B0502040204020203" pitchFamily="34" charset="0"/>
+              </a:rPr>
+              <a:t>6</a:t>
+            </a:r>
+            <a:endParaRPr lang="en-US" b="1" dirty="0">
+              <a:latin typeface="Segoe UI" panose="020B0502040204020203" pitchFamily="34" charset="0"/>
+              <a:cs typeface="Segoe UI" panose="020B0502040204020203" pitchFamily="34" charset="0"/>
+            </a:endParaRPr>
+          </a:p>
+        </p:txBody>
+      </p:sp>
       <p:pic>
         <p:nvPicPr>
-          <p:cNvPr id="23554" name="Picture 2" descr="C:\Users\dulum\Desktop\ДИПЛОМ\MDMAgent\for_presentation\png\C4_Frontend.png"/>
+          <p:cNvPr id="1026" name="Picture 2" descr="C:\Users\dulum\Desktop\ДИПЛОМ\MDMAgent\for_presentation\png\C4_Frontend.png"/>
           <p:cNvPicPr>
             <a:picLocks noChangeAspect="1" noChangeArrowheads="1"/>
           </p:cNvPicPr>
@@ -4651,8 +4701,8 @@
         </p:blipFill>
         <p:spPr bwMode="auto">
           <a:xfrm>
-            <a:off x="964743" y="1127098"/>
-            <a:ext cx="10495672" cy="5730901"/>
+            <a:off x="49116" y="1516292"/>
+            <a:ext cx="12093462" cy="4591973"/>
           </a:xfrm>
           <a:prstGeom prst="rect">
             <a:avLst/>
@@ -4669,56 +4719,6 @@
           </a:extLst>
         </p:spPr>
       </p:pic>
-      <p:sp>
-        <p:nvSpPr>
-          <p:cNvPr id="6" name="Прямоугольник 5"/>
-          <p:cNvSpPr/>
-          <p:nvPr/>
-        </p:nvSpPr>
-        <p:spPr>
-          <a:xfrm>
-            <a:off x="11274007" y="6366476"/>
-            <a:ext cx="819455" cy="369332"/>
-          </a:xfrm>
-          <a:prstGeom prst="rect">
-            <a:avLst/>
-          </a:prstGeom>
-        </p:spPr>
-        <p:txBody>
-          <a:bodyPr wrap="none">
-            <a:spAutoFit/>
-          </a:bodyPr>
-          <a:lstStyle/>
-          <a:p>
-            <a:fld id="{C1FF6DA9-008F-8B48-92A6-B652298478BF}" type="slidenum">
-              <a:rPr lang="en-US" b="1" smtClean="0">
-                <a:latin typeface="Segoe UI" panose="020B0502040204020203" pitchFamily="34" charset="0"/>
-                <a:cs typeface="Segoe UI" panose="020B0502040204020203" pitchFamily="34" charset="0"/>
-              </a:rPr>
-              <a:pPr/>
-              <a:t>10</a:t>
-            </a:fld>
-            <a:r>
-              <a:rPr lang="en-US" b="1" dirty="0" smtClean="0">
-                <a:latin typeface="Segoe UI" panose="020B0502040204020203" pitchFamily="34" charset="0"/>
-                <a:cs typeface="Segoe UI" panose="020B0502040204020203" pitchFamily="34" charset="0"/>
-              </a:rPr>
-              <a:t>/2</a:t>
-            </a:r>
-            <a:r>
-              <a:rPr lang="ru-RU" b="1" dirty="0" smtClean="0">
-                <a:latin typeface="Segoe UI" panose="020B0502040204020203" pitchFamily="34" charset="0"/>
-                <a:cs typeface="Segoe UI" panose="020B0502040204020203" pitchFamily="34" charset="0"/>
-              </a:rPr>
-              <a:t>6</a:t>
-            </a:r>
-            <a:endParaRPr lang="en-US" b="1" dirty="0">
-              <a:latin typeface="Segoe UI" panose="020B0502040204020203" pitchFamily="34" charset="0"/>
-              <a:cs typeface="Segoe UI" panose="020B0502040204020203" pitchFamily="34" charset="0"/>
-            </a:endParaRPr>
-          </a:p>
-        </p:txBody>
-      </p:sp>
     </p:spTree>
     <p:extLst>
       <p:ext uri="{BB962C8B-B14F-4D97-AF65-F5344CB8AC3E}">
@@ -4808,8 +4808,8 @@
         </p:nvSpPr>
         <p:spPr>
           <a:xfrm>
-            <a:off x="2044276" y="270429"/>
-            <a:ext cx="7966954" cy="523220"/>
+            <a:off x="4070060" y="186253"/>
+            <a:ext cx="4051569" cy="646331"/>
           </a:xfrm>
           <a:prstGeom prst="rect">
             <a:avLst/>
@@ -4831,16 +4831,74 @@
               </a:defRPr>
             </a:pPr>
             <a:r>
-              <a:rPr lang="ru-RU" sz="2800" b="1" dirty="0"/>
-              <a:t>Техническая архитектура и модули системы</a:t>
-            </a:r>
-            <a:endParaRPr dirty="0"/>
+              <a:rPr lang="ru-RU" sz="3600" b="1" dirty="0"/>
+              <a:t>М</a:t>
+            </a:r>
+            <a:r>
+              <a:rPr lang="ru-RU" sz="3600" b="1" dirty="0" smtClean="0"/>
+              <a:t>одули </a:t>
+            </a:r>
+            <a:r>
+              <a:rPr lang="ru-RU" sz="3600" b="1" dirty="0"/>
+              <a:t>системы</a:t>
+            </a:r>
+            <a:endParaRPr sz="3600" dirty="0"/>
+          </a:p>
+        </p:txBody>
+      </p:sp>
+      <p:sp>
+        <p:nvSpPr>
+          <p:cNvPr id="6" name="Прямоугольник 5"/>
+          <p:cNvSpPr/>
+          <p:nvPr/>
+        </p:nvSpPr>
+        <p:spPr>
+          <a:xfrm>
+            <a:off x="10840870" y="6054593"/>
+            <a:ext cx="819455" cy="369332"/>
+          </a:xfrm>
+          <a:prstGeom prst="rect">
+            <a:avLst/>
+          </a:prstGeom>
+        </p:spPr>
+        <p:txBody>
+          <a:bodyPr wrap="none">
+            <a:spAutoFit/>
+          </a:bodyPr>
+          <a:lstStyle/>
+          <a:p>
+            <a:fld id="{C1FF6DA9-008F-8B48-92A6-B652298478BF}" type="slidenum">
+              <a:rPr lang="en-US" b="1" smtClean="0">
+                <a:latin typeface="Segoe UI" panose="020B0502040204020203" pitchFamily="34" charset="0"/>
+                <a:cs typeface="Segoe UI" panose="020B0502040204020203" pitchFamily="34" charset="0"/>
+              </a:rPr>
+              <a:pPr/>
+              <a:t>11</a:t>
+            </a:fld>
+            <a:r>
+              <a:rPr lang="en-US" b="1" dirty="0" smtClean="0">
+                <a:latin typeface="Segoe UI" panose="020B0502040204020203" pitchFamily="34" charset="0"/>
+                <a:cs typeface="Segoe UI" panose="020B0502040204020203" pitchFamily="34" charset="0"/>
+              </a:rPr>
+              <a:t>/2</a:t>
+            </a:r>
+            <a:r>
+              <a:rPr lang="ru-RU" b="1" dirty="0" smtClean="0">
+                <a:latin typeface="Segoe UI" panose="020B0502040204020203" pitchFamily="34" charset="0"/>
+                <a:cs typeface="Segoe UI" panose="020B0502040204020203" pitchFamily="34" charset="0"/>
+              </a:rPr>
+              <a:t>6</a:t>
+            </a:r>
+            <a:endParaRPr lang="en-US" b="1" dirty="0">
+              <a:latin typeface="Segoe UI" panose="020B0502040204020203" pitchFamily="34" charset="0"/>
+              <a:cs typeface="Segoe UI" panose="020B0502040204020203" pitchFamily="34" charset="0"/>
+            </a:endParaRPr>
           </a:p>
         </p:txBody>
       </p:sp>
       <p:pic>
         <p:nvPicPr>
-          <p:cNvPr id="3074" name="Picture 2" descr="C:\Users\dulum\Desktop\ДИПЛОМ\MDMAgent\for_presentation\png\Functional_Scheme.png"/>
+          <p:cNvPr id="2050" name="Picture 2" descr="C:\Users\dulum\Desktop\ДИПЛОМ\MDMAgent\for_presentation\png\Functional_Scheme.png"/>
           <p:cNvPicPr>
             <a:picLocks noChangeAspect="1" noChangeArrowheads="1"/>
           </p:cNvPicPr>
@@ -4861,8 +4919,8 @@
         </p:blipFill>
         <p:spPr bwMode="auto">
           <a:xfrm>
-            <a:off x="1456157" y="1108458"/>
-            <a:ext cx="9279377" cy="5749542"/>
+            <a:off x="1327592" y="1111718"/>
+            <a:ext cx="9163945" cy="5678019"/>
           </a:xfrm>
           <a:prstGeom prst="rect">
             <a:avLst/>
@@ -4879,56 +4937,6 @@
           </a:extLst>
         </p:spPr>
       </p:pic>
-      <p:sp>
-        <p:nvSpPr>
-          <p:cNvPr id="6" name="Прямоугольник 5"/>
-          <p:cNvSpPr/>
-          <p:nvPr/>
-        </p:nvSpPr>
-        <p:spPr>
-          <a:xfrm>
-            <a:off x="10840870" y="6054593"/>
-            <a:ext cx="819455" cy="369332"/>
-          </a:xfrm>
-          <a:prstGeom prst="rect">
-            <a:avLst/>
-          </a:prstGeom>
-        </p:spPr>
-        <p:txBody>
-          <a:bodyPr wrap="none">
-            <a:spAutoFit/>
-          </a:bodyPr>
-          <a:lstStyle/>
-          <a:p>
-            <a:fld id="{C1FF6DA9-008F-8B48-92A6-B652298478BF}" type="slidenum">
-              <a:rPr lang="en-US" b="1" smtClean="0">
-                <a:latin typeface="Segoe UI" panose="020B0502040204020203" pitchFamily="34" charset="0"/>
-                <a:cs typeface="Segoe UI" panose="020B0502040204020203" pitchFamily="34" charset="0"/>
-              </a:rPr>
-              <a:pPr/>
-              <a:t>11</a:t>
-            </a:fld>
-            <a:r>
-              <a:rPr lang="en-US" b="1" dirty="0" smtClean="0">
-                <a:latin typeface="Segoe UI" panose="020B0502040204020203" pitchFamily="34" charset="0"/>
-                <a:cs typeface="Segoe UI" panose="020B0502040204020203" pitchFamily="34" charset="0"/>
-              </a:rPr>
-              <a:t>/2</a:t>
-            </a:r>
-            <a:r>
-              <a:rPr lang="ru-RU" b="1" dirty="0" smtClean="0">
-                <a:latin typeface="Segoe UI" panose="020B0502040204020203" pitchFamily="34" charset="0"/>
-                <a:cs typeface="Segoe UI" panose="020B0502040204020203" pitchFamily="34" charset="0"/>
-              </a:rPr>
-              <a:t>6</a:t>
-            </a:r>
-            <a:endParaRPr lang="en-US" b="1" dirty="0">
-              <a:latin typeface="Segoe UI" panose="020B0502040204020203" pitchFamily="34" charset="0"/>
-              <a:cs typeface="Segoe UI" panose="020B0502040204020203" pitchFamily="34" charset="0"/>
-            </a:endParaRPr>
-          </a:p>
-        </p:txBody>
-      </p:sp>
     </p:spTree>
   </p:cSld>
   <p:clrMapOvr>
@@ -5013,8 +5021,8 @@
         </p:nvSpPr>
         <p:spPr>
           <a:xfrm>
-            <a:off x="68399" y="234613"/>
-            <a:ext cx="12191695" cy="954107"/>
+            <a:off x="1356936" y="198129"/>
+            <a:ext cx="9614615" cy="1077218"/>
           </a:xfrm>
           <a:prstGeom prst="rect">
             <a:avLst/>
@@ -5036,24 +5044,12 @@
               </a:defRPr>
             </a:pPr>
             <a:r>
-              <a:rPr dirty="0" err="1"/>
-              <a:t>Информационная</a:t>
-            </a:r>
-            <a:r>
-              <a:rPr dirty="0"/>
-              <a:t> </a:t>
-            </a:r>
-            <a:r>
-              <a:rPr dirty="0" err="1" smtClean="0"/>
-              <a:t>схема</a:t>
-            </a:r>
-            <a:r>
-              <a:rPr lang="en-US" dirty="0" smtClean="0"/>
-              <a:t>. </a:t>
-            </a:r>
-            <a:r>
-              <a:rPr lang="ru-RU" dirty="0"/>
-              <a:t>Сущности и типы хранимой информации</a:t>
+              <a:rPr lang="ru-RU" sz="3600" dirty="0" smtClean="0"/>
+              <a:t>Сущности </a:t>
+            </a:r>
+            <a:r>
+              <a:rPr lang="ru-RU" sz="3600" dirty="0"/>
+              <a:t>и типы хранимой информации</a:t>
             </a:r>
           </a:p>
           <a:p>
@@ -5290,9 +5286,59 @@
           </a:p>
         </p:txBody>
       </p:sp>
+      <p:sp>
+        <p:nvSpPr>
+          <p:cNvPr id="5" name="Прямоугольник 4"/>
+          <p:cNvSpPr/>
+          <p:nvPr/>
+        </p:nvSpPr>
+        <p:spPr>
+          <a:xfrm>
+            <a:off x="10941666" y="6155645"/>
+            <a:ext cx="819455" cy="369332"/>
+          </a:xfrm>
+          <a:prstGeom prst="rect">
+            <a:avLst/>
+          </a:prstGeom>
+        </p:spPr>
+        <p:txBody>
+          <a:bodyPr wrap="none">
+            <a:spAutoFit/>
+          </a:bodyPr>
+          <a:lstStyle/>
+          <a:p>
+            <a:fld id="{C1FF6DA9-008F-8B48-92A6-B652298478BF}" type="slidenum">
+              <a:rPr lang="en-US" b="1">
+                <a:latin typeface="Segoe UI" panose="020B0502040204020203" pitchFamily="34" charset="0"/>
+                <a:cs typeface="Segoe UI" panose="020B0502040204020203" pitchFamily="34" charset="0"/>
+              </a:rPr>
+              <a:pPr/>
+              <a:t>13</a:t>
+            </a:fld>
+            <a:r>
+              <a:rPr lang="en-US" b="1" dirty="0">
+                <a:latin typeface="Segoe UI" panose="020B0502040204020203" pitchFamily="34" charset="0"/>
+                <a:cs typeface="Segoe UI" panose="020B0502040204020203" pitchFamily="34" charset="0"/>
+              </a:rPr>
+              <a:t>/2</a:t>
+            </a:r>
+            <a:r>
+              <a:rPr lang="ru-RU" b="1" dirty="0">
+                <a:latin typeface="Segoe UI" panose="020B0502040204020203" pitchFamily="34" charset="0"/>
+                <a:cs typeface="Segoe UI" panose="020B0502040204020203" pitchFamily="34" charset="0"/>
+              </a:rPr>
+              <a:t>6</a:t>
+            </a:r>
+            <a:endParaRPr lang="en-US" b="1" dirty="0">
+              <a:latin typeface="Segoe UI" panose="020B0502040204020203" pitchFamily="34" charset="0"/>
+              <a:cs typeface="Segoe UI" panose="020B0502040204020203" pitchFamily="34" charset="0"/>
+            </a:endParaRPr>
+          </a:p>
+        </p:txBody>
+      </p:sp>
       <p:pic>
         <p:nvPicPr>
-          <p:cNvPr id="7171" name="Picture 3" descr="C:\Users\dulum\Desktop\ДИПЛОМ\MDMAgent\for_presentation\png\ER_Diagram.png"/>
+          <p:cNvPr id="3074" name="Picture 2" descr="C:\Users\dulum\Desktop\ДИПЛОМ\MDMAgent\for_presentation\png\ER_Diagram.png"/>
           <p:cNvPicPr>
             <a:picLocks noChangeAspect="1" noChangeArrowheads="1"/>
           </p:cNvPicPr>
@@ -5313,8 +5359,8 @@
         </p:blipFill>
         <p:spPr bwMode="auto">
           <a:xfrm>
-            <a:off x="149071" y="1551895"/>
-            <a:ext cx="11893551" cy="4603750"/>
+            <a:off x="149072" y="1551895"/>
+            <a:ext cx="11893550" cy="4603750"/>
           </a:xfrm>
           <a:prstGeom prst="rect">
             <a:avLst/>
@@ -5331,56 +5377,6 @@
           </a:extLst>
         </p:spPr>
       </p:pic>
-      <p:sp>
-        <p:nvSpPr>
-          <p:cNvPr id="5" name="Прямоугольник 4"/>
-          <p:cNvSpPr/>
-          <p:nvPr/>
-        </p:nvSpPr>
-        <p:spPr>
-          <a:xfrm>
-            <a:off x="10941666" y="6155645"/>
-            <a:ext cx="819455" cy="369332"/>
-          </a:xfrm>
-          <a:prstGeom prst="rect">
-            <a:avLst/>
-          </a:prstGeom>
-        </p:spPr>
-        <p:txBody>
-          <a:bodyPr wrap="none">
-            <a:spAutoFit/>
-          </a:bodyPr>
-          <a:lstStyle/>
-          <a:p>
-            <a:fld id="{C1FF6DA9-008F-8B48-92A6-B652298478BF}" type="slidenum">
-              <a:rPr lang="en-US" b="1">
-                <a:latin typeface="Segoe UI" panose="020B0502040204020203" pitchFamily="34" charset="0"/>
-                <a:cs typeface="Segoe UI" panose="020B0502040204020203" pitchFamily="34" charset="0"/>
-              </a:rPr>
-              <a:pPr/>
-              <a:t>13</a:t>
-            </a:fld>
-            <a:r>
-              <a:rPr lang="en-US" b="1" dirty="0">
-                <a:latin typeface="Segoe UI" panose="020B0502040204020203" pitchFamily="34" charset="0"/>
-                <a:cs typeface="Segoe UI" panose="020B0502040204020203" pitchFamily="34" charset="0"/>
-              </a:rPr>
-              <a:t>/2</a:t>
-            </a:r>
-            <a:r>
-              <a:rPr lang="ru-RU" b="1" dirty="0">
-                <a:latin typeface="Segoe UI" panose="020B0502040204020203" pitchFamily="34" charset="0"/>
-                <a:cs typeface="Segoe UI" panose="020B0502040204020203" pitchFamily="34" charset="0"/>
-              </a:rPr>
-              <a:t>6</a:t>
-            </a:r>
-            <a:endParaRPr lang="en-US" b="1" dirty="0">
-              <a:latin typeface="Segoe UI" panose="020B0502040204020203" pitchFamily="34" charset="0"/>
-              <a:cs typeface="Segoe UI" panose="020B0502040204020203" pitchFamily="34" charset="0"/>
-            </a:endParaRPr>
-          </a:p>
-        </p:txBody>
-      </p:sp>
     </p:spTree>
   </p:cSld>
   <p:clrMapOvr>
@@ -5978,9 +5974,59 @@
           </a:p>
         </p:txBody>
       </p:sp>
+      <p:sp>
+        <p:nvSpPr>
+          <p:cNvPr id="6" name="Прямоугольник 5"/>
+          <p:cNvSpPr/>
+          <p:nvPr/>
+        </p:nvSpPr>
+        <p:spPr>
+          <a:xfrm>
+            <a:off x="10840870" y="6054593"/>
+            <a:ext cx="819455" cy="369332"/>
+          </a:xfrm>
+          <a:prstGeom prst="rect">
+            <a:avLst/>
+          </a:prstGeom>
+        </p:spPr>
+        <p:txBody>
+          <a:bodyPr wrap="none">
+            <a:spAutoFit/>
+          </a:bodyPr>
+          <a:lstStyle/>
+          <a:p>
+            <a:fld id="{C1FF6DA9-008F-8B48-92A6-B652298478BF}" type="slidenum">
+              <a:rPr lang="en-US" b="1" smtClean="0">
+                <a:latin typeface="Segoe UI" panose="020B0502040204020203" pitchFamily="34" charset="0"/>
+                <a:cs typeface="Segoe UI" panose="020B0502040204020203" pitchFamily="34" charset="0"/>
+              </a:rPr>
+              <a:pPr/>
+              <a:t>16</a:t>
+            </a:fld>
+            <a:r>
+              <a:rPr lang="en-US" b="1" dirty="0" smtClean="0">
+                <a:latin typeface="Segoe UI" panose="020B0502040204020203" pitchFamily="34" charset="0"/>
+                <a:cs typeface="Segoe UI" panose="020B0502040204020203" pitchFamily="34" charset="0"/>
+              </a:rPr>
+              <a:t>/2</a:t>
+            </a:r>
+            <a:r>
+              <a:rPr lang="ru-RU" b="1" dirty="0" smtClean="0">
+                <a:latin typeface="Segoe UI" panose="020B0502040204020203" pitchFamily="34" charset="0"/>
+                <a:cs typeface="Segoe UI" panose="020B0502040204020203" pitchFamily="34" charset="0"/>
+              </a:rPr>
+              <a:t>6</a:t>
+            </a:r>
+            <a:endParaRPr lang="en-US" b="1" dirty="0">
+              <a:latin typeface="Segoe UI" panose="020B0502040204020203" pitchFamily="34" charset="0"/>
+              <a:cs typeface="Segoe UI" panose="020B0502040204020203" pitchFamily="34" charset="0"/>
+            </a:endParaRPr>
+          </a:p>
+        </p:txBody>
+      </p:sp>
       <p:pic>
         <p:nvPicPr>
-          <p:cNvPr id="6146" name="Picture 2" descr="C:\Users\dulum\Desktop\ДИПЛОМ\MDMAgent\for_presentation\png\Deployment.png"/>
+          <p:cNvPr id="4" name="Picture 2" descr="C:\Users\dulum\Desktop\ДИПЛОМ\MDMAgent\for_presentation\png\Deployment.png"/>
           <p:cNvPicPr>
             <a:picLocks noChangeAspect="1" noChangeArrowheads="1"/>
           </p:cNvPicPr>
@@ -6001,8 +6047,8 @@
         </p:blipFill>
         <p:spPr bwMode="auto">
           <a:xfrm>
-            <a:off x="2814762" y="1056551"/>
-            <a:ext cx="6562169" cy="5801449"/>
+            <a:off x="3115991" y="1145862"/>
+            <a:ext cx="6461146" cy="5712137"/>
           </a:xfrm>
           <a:prstGeom prst="rect">
             <a:avLst/>
@@ -6019,56 +6065,6 @@
           </a:extLst>
         </p:spPr>
       </p:pic>
-      <p:sp>
-        <p:nvSpPr>
-          <p:cNvPr id="6" name="Прямоугольник 5"/>
-          <p:cNvSpPr/>
-          <p:nvPr/>
-        </p:nvSpPr>
-        <p:spPr>
-          <a:xfrm>
-            <a:off x="10840870" y="6054593"/>
-            <a:ext cx="819455" cy="369332"/>
-          </a:xfrm>
-          <a:prstGeom prst="rect">
-            <a:avLst/>
-          </a:prstGeom>
-        </p:spPr>
-        <p:txBody>
-          <a:bodyPr wrap="none">
-            <a:spAutoFit/>
-          </a:bodyPr>
-          <a:lstStyle/>
-          <a:p>
-            <a:fld id="{C1FF6DA9-008F-8B48-92A6-B652298478BF}" type="slidenum">
-              <a:rPr lang="en-US" b="1" smtClean="0">
-                <a:latin typeface="Segoe UI" panose="020B0502040204020203" pitchFamily="34" charset="0"/>
-                <a:cs typeface="Segoe UI" panose="020B0502040204020203" pitchFamily="34" charset="0"/>
-              </a:rPr>
-              <a:pPr/>
-              <a:t>16</a:t>
-            </a:fld>
-            <a:r>
-              <a:rPr lang="en-US" b="1" dirty="0" smtClean="0">
-                <a:latin typeface="Segoe UI" panose="020B0502040204020203" pitchFamily="34" charset="0"/>
-                <a:cs typeface="Segoe UI" panose="020B0502040204020203" pitchFamily="34" charset="0"/>
-              </a:rPr>
-              <a:t>/2</a:t>
-            </a:r>
-            <a:r>
-              <a:rPr lang="ru-RU" b="1" dirty="0" smtClean="0">
-                <a:latin typeface="Segoe UI" panose="020B0502040204020203" pitchFamily="34" charset="0"/>
-                <a:cs typeface="Segoe UI" panose="020B0502040204020203" pitchFamily="34" charset="0"/>
-              </a:rPr>
-              <a:t>6</a:t>
-            </a:r>
-            <a:endParaRPr lang="en-US" b="1" dirty="0">
-              <a:latin typeface="Segoe UI" panose="020B0502040204020203" pitchFamily="34" charset="0"/>
-              <a:cs typeface="Segoe UI" panose="020B0502040204020203" pitchFamily="34" charset="0"/>
-            </a:endParaRPr>
-          </a:p>
-        </p:txBody>
-      </p:sp>
     </p:spTree>
   </p:cSld>
   <p:clrMapOvr>
@@ -6412,8 +6408,8 @@
         </p:nvSpPr>
         <p:spPr>
           <a:xfrm>
-            <a:off x="731520" y="137160"/>
-            <a:ext cx="10698480" cy="523220"/>
+            <a:off x="3472963" y="179754"/>
+            <a:ext cx="5245768" cy="646331"/>
           </a:xfrm>
           <a:prstGeom prst="rect">
             <a:avLst/>
@@ -6435,10 +6431,10 @@
               </a:defRPr>
             </a:pPr>
             <a:r>
-              <a:rPr lang="ru-RU" dirty="0" smtClean="0"/>
+              <a:rPr lang="ru-RU" sz="3600" dirty="0" smtClean="0"/>
               <a:t>Список справочников</a:t>
             </a:r>
-            <a:endParaRPr dirty="0"/>
+            <a:endParaRPr sz="3600" dirty="0"/>
           </a:p>
         </p:txBody>
       </p:sp>
@@ -6622,8 +6618,8 @@
         </p:nvSpPr>
         <p:spPr>
           <a:xfrm>
-            <a:off x="731520" y="137160"/>
-            <a:ext cx="10698480" cy="523220"/>
+            <a:off x="3294895" y="179754"/>
+            <a:ext cx="5601903" cy="646331"/>
           </a:xfrm>
           <a:prstGeom prst="rect">
             <a:avLst/>
@@ -6645,10 +6641,10 @@
               </a:defRPr>
             </a:pPr>
             <a:r>
-              <a:rPr lang="ru-RU" dirty="0" smtClean="0"/>
+              <a:rPr lang="ru-RU" sz="3600" dirty="0" smtClean="0"/>
               <a:t>Просмотр справочника</a:t>
             </a:r>
-            <a:endParaRPr dirty="0"/>
+            <a:endParaRPr sz="3600" dirty="0"/>
           </a:p>
         </p:txBody>
       </p:sp>
@@ -6833,8 +6829,8 @@
         </p:nvSpPr>
         <p:spPr>
           <a:xfrm>
-            <a:off x="4186222" y="148977"/>
-            <a:ext cx="3819250" cy="707886"/>
+            <a:off x="4454356" y="179754"/>
+            <a:ext cx="3282982" cy="646331"/>
           </a:xfrm>
           <a:prstGeom prst="rect">
             <a:avLst/>
@@ -6856,10 +6852,10 @@
               </a:defRPr>
             </a:pPr>
             <a:r>
-              <a:rPr sz="4000" dirty="0" err="1"/>
+              <a:rPr sz="3600" dirty="0" err="1"/>
               <a:t>Актуальность</a:t>
             </a:r>
-            <a:endParaRPr sz="4000" dirty="0"/>
+            <a:endParaRPr sz="3600" dirty="0"/>
           </a:p>
         </p:txBody>
       </p:sp>
@@ -7004,8 +7000,8 @@
         </p:nvSpPr>
         <p:spPr>
           <a:xfrm>
-            <a:off x="1176325" y="1755980"/>
-            <a:ext cx="10350951" cy="4667945"/>
+            <a:off x="964855" y="1755980"/>
+            <a:ext cx="10350951" cy="5037276"/>
           </a:xfrm>
           <a:prstGeom prst="rect">
             <a:avLst/>
@@ -7030,84 +7026,84 @@
               </a:defRPr>
             </a:pPr>
             <a:r>
-              <a:rPr sz="2400" dirty="0" err="1">
+              <a:rPr sz="2300" dirty="0" err="1">
                 <a:latin typeface="Segoe UI Black" panose="020B0A02040204020203" pitchFamily="34" charset="0"/>
                 <a:ea typeface="Segoe UI Black" panose="020B0A02040204020203" pitchFamily="34" charset="0"/>
               </a:rPr>
               <a:t>На</a:t>
             </a:r>
             <a:r>
-              <a:rPr sz="2400" dirty="0">
+              <a:rPr sz="2300" dirty="0">
                 <a:latin typeface="Segoe UI Black" panose="020B0A02040204020203" pitchFamily="34" charset="0"/>
                 <a:ea typeface="Segoe UI Black" panose="020B0A02040204020203" pitchFamily="34" charset="0"/>
               </a:rPr>
               <a:t> </a:t>
             </a:r>
             <a:r>
-              <a:rPr sz="2400" dirty="0" err="1">
+              <a:rPr sz="2300" dirty="0" err="1">
                 <a:latin typeface="Segoe UI Black" panose="020B0A02040204020203" pitchFamily="34" charset="0"/>
                 <a:ea typeface="Segoe UI Black" panose="020B0A02040204020203" pitchFamily="34" charset="0"/>
               </a:rPr>
               <a:t>заводе</a:t>
             </a:r>
             <a:r>
-              <a:rPr sz="2400" dirty="0">
+              <a:rPr sz="2300" dirty="0">
                 <a:latin typeface="Segoe UI Black" panose="020B0A02040204020203" pitchFamily="34" charset="0"/>
                 <a:ea typeface="Segoe UI Black" panose="020B0A02040204020203" pitchFamily="34" charset="0"/>
               </a:rPr>
               <a:t> </a:t>
             </a:r>
             <a:r>
-              <a:rPr sz="2400" dirty="0" err="1">
+              <a:rPr sz="2300" dirty="0" err="1">
                 <a:latin typeface="Segoe UI Black" panose="020B0A02040204020203" pitchFamily="34" charset="0"/>
                 <a:ea typeface="Segoe UI Black" panose="020B0A02040204020203" pitchFamily="34" charset="0"/>
               </a:rPr>
               <a:t>используются</a:t>
             </a:r>
             <a:r>
-              <a:rPr sz="2400" dirty="0">
+              <a:rPr sz="2300" dirty="0">
                 <a:latin typeface="Segoe UI Black" panose="020B0A02040204020203" pitchFamily="34" charset="0"/>
                 <a:ea typeface="Segoe UI Black" panose="020B0A02040204020203" pitchFamily="34" charset="0"/>
               </a:rPr>
               <a:t> </a:t>
             </a:r>
             <a:r>
-              <a:rPr sz="2400" dirty="0" err="1">
+              <a:rPr sz="2300" dirty="0" err="1">
                 <a:latin typeface="Segoe UI Black" panose="020B0A02040204020203" pitchFamily="34" charset="0"/>
                 <a:ea typeface="Segoe UI Black" panose="020B0A02040204020203" pitchFamily="34" charset="0"/>
               </a:rPr>
               <a:t>несколько</a:t>
             </a:r>
             <a:r>
-              <a:rPr sz="2400" dirty="0">
+              <a:rPr sz="2300" dirty="0">
                 <a:latin typeface="Segoe UI Black" panose="020B0A02040204020203" pitchFamily="34" charset="0"/>
                 <a:ea typeface="Segoe UI Black" panose="020B0A02040204020203" pitchFamily="34" charset="0"/>
               </a:rPr>
               <a:t> </a:t>
             </a:r>
             <a:r>
-              <a:rPr sz="2400" dirty="0" err="1">
+              <a:rPr sz="2300" dirty="0" err="1">
                 <a:latin typeface="Segoe UI Black" panose="020B0A02040204020203" pitchFamily="34" charset="0"/>
                 <a:ea typeface="Segoe UI Black" panose="020B0A02040204020203" pitchFamily="34" charset="0"/>
               </a:rPr>
               <a:t>учётных</a:t>
             </a:r>
             <a:r>
-              <a:rPr sz="2400" dirty="0">
+              <a:rPr sz="2300" dirty="0">
                 <a:latin typeface="Segoe UI Black" panose="020B0A02040204020203" pitchFamily="34" charset="0"/>
                 <a:ea typeface="Segoe UI Black" panose="020B0A02040204020203" pitchFamily="34" charset="0"/>
               </a:rPr>
               <a:t> </a:t>
             </a:r>
             <a:r>
-              <a:rPr sz="2400" dirty="0" err="1">
+              <a:rPr sz="2300" dirty="0" err="1">
                 <a:latin typeface="Segoe UI Black" panose="020B0A02040204020203" pitchFamily="34" charset="0"/>
                 <a:ea typeface="Segoe UI Black" panose="020B0A02040204020203" pitchFamily="34" charset="0"/>
               </a:rPr>
               <a:t>систем</a:t>
             </a:r>
             <a:r>
-              <a:rPr sz="2400" dirty="0">
+              <a:rPr sz="2300" dirty="0">
                 <a:latin typeface="Segoe UI Black" panose="020B0A02040204020203" pitchFamily="34" charset="0"/>
                 <a:ea typeface="Segoe UI Black" panose="020B0A02040204020203" pitchFamily="34" charset="0"/>
               </a:rPr>
@@ -7127,48 +7123,62 @@
               </a:defRPr>
             </a:pPr>
             <a:r>
-              <a:rPr sz="2400" dirty="0">
-                <a:latin typeface="Segoe UI Black" panose="020B0A02040204020203" pitchFamily="34" charset="0"/>
-                <a:ea typeface="Segoe UI Black" panose="020B0A02040204020203" pitchFamily="34" charset="0"/>
-              </a:rPr>
-              <a:t>   1С:ERP — </a:t>
-            </a:r>
-            <a:r>
-              <a:rPr sz="2400" dirty="0" err="1">
+              <a:rPr sz="2300" dirty="0">
+                <a:latin typeface="Segoe UI Black" panose="020B0A02040204020203" pitchFamily="34" charset="0"/>
+                <a:ea typeface="Segoe UI Black" panose="020B0A02040204020203" pitchFamily="34" charset="0"/>
+              </a:rPr>
+              <a:t>  </a:t>
+            </a:r>
+            <a:r>
+              <a:rPr sz="2300" dirty="0" smtClean="0">
+                <a:latin typeface="Segoe UI Black" panose="020B0A02040204020203" pitchFamily="34" charset="0"/>
+                <a:ea typeface="Segoe UI Black" panose="020B0A02040204020203" pitchFamily="34" charset="0"/>
+              </a:rPr>
+              <a:t>1С:ERP </a:t>
+            </a:r>
+            <a:r>
+              <a:rPr sz="2300" dirty="0">
+                <a:latin typeface="Segoe UI Black" panose="020B0A02040204020203" pitchFamily="34" charset="0"/>
+                <a:ea typeface="Segoe UI Black" panose="020B0A02040204020203" pitchFamily="34" charset="0"/>
+              </a:rPr>
+              <a:t>— </a:t>
+            </a:r>
+            <a:r>
+              <a:rPr sz="2300" dirty="0" err="1">
                 <a:latin typeface="Segoe UI Black" panose="020B0A02040204020203" pitchFamily="34" charset="0"/>
                 <a:ea typeface="Segoe UI Black" panose="020B0A02040204020203" pitchFamily="34" charset="0"/>
               </a:rPr>
               <a:t>управление</a:t>
             </a:r>
             <a:r>
-              <a:rPr sz="2400" dirty="0">
+              <a:rPr sz="2300" dirty="0">
                 <a:latin typeface="Segoe UI Black" panose="020B0A02040204020203" pitchFamily="34" charset="0"/>
                 <a:ea typeface="Segoe UI Black" panose="020B0A02040204020203" pitchFamily="34" charset="0"/>
               </a:rPr>
               <a:t> </a:t>
             </a:r>
             <a:r>
-              <a:rPr sz="2400" dirty="0" err="1">
+              <a:rPr sz="2300" dirty="0" err="1">
                 <a:latin typeface="Segoe UI Black" panose="020B0A02040204020203" pitchFamily="34" charset="0"/>
                 <a:ea typeface="Segoe UI Black" panose="020B0A02040204020203" pitchFamily="34" charset="0"/>
               </a:rPr>
               <a:t>ресурсами</a:t>
             </a:r>
             <a:r>
-              <a:rPr sz="2400" dirty="0">
+              <a:rPr sz="2300" dirty="0">
                 <a:latin typeface="Segoe UI Black" panose="020B0A02040204020203" pitchFamily="34" charset="0"/>
                 <a:ea typeface="Segoe UI Black" panose="020B0A02040204020203" pitchFamily="34" charset="0"/>
               </a:rPr>
               <a:t> </a:t>
             </a:r>
             <a:r>
-              <a:rPr sz="2400" dirty="0" err="1">
+              <a:rPr sz="2300" dirty="0" err="1">
                 <a:latin typeface="Segoe UI Black" panose="020B0A02040204020203" pitchFamily="34" charset="0"/>
                 <a:ea typeface="Segoe UI Black" panose="020B0A02040204020203" pitchFamily="34" charset="0"/>
               </a:rPr>
               <a:t>предприятия</a:t>
             </a:r>
-            <a:endParaRPr sz="2400" dirty="0">
+            <a:endParaRPr sz="2300" dirty="0">
               <a:latin typeface="Segoe UI Black" panose="020B0A02040204020203" pitchFamily="34" charset="0"/>
               <a:ea typeface="Segoe UI Black" panose="020B0A02040204020203" pitchFamily="34" charset="0"/>
             </a:endParaRPr>
@@ -7186,34 +7196,48 @@
               </a:defRPr>
             </a:pPr>
             <a:r>
-              <a:rPr sz="2400" dirty="0">
-                <a:latin typeface="Segoe UI Black" panose="020B0A02040204020203" pitchFamily="34" charset="0"/>
-                <a:ea typeface="Segoe UI Black" panose="020B0A02040204020203" pitchFamily="34" charset="0"/>
-              </a:rPr>
-              <a:t>   АСУ ММЗ — </a:t>
-            </a:r>
-            <a:r>
-              <a:rPr sz="2400" dirty="0" err="1">
+              <a:rPr sz="2300" dirty="0">
+                <a:latin typeface="Segoe UI Black" panose="020B0A02040204020203" pitchFamily="34" charset="0"/>
+                <a:ea typeface="Segoe UI Black" panose="020B0A02040204020203" pitchFamily="34" charset="0"/>
+              </a:rPr>
+              <a:t>  </a:t>
+            </a:r>
+            <a:r>
+              <a:rPr sz="2300" dirty="0" smtClean="0">
+                <a:latin typeface="Segoe UI Black" panose="020B0A02040204020203" pitchFamily="34" charset="0"/>
+                <a:ea typeface="Segoe UI Black" panose="020B0A02040204020203" pitchFamily="34" charset="0"/>
+              </a:rPr>
+              <a:t>АСУ </a:t>
+            </a:r>
+            <a:r>
+              <a:rPr sz="2300" dirty="0">
+                <a:latin typeface="Segoe UI Black" panose="020B0A02040204020203" pitchFamily="34" charset="0"/>
+                <a:ea typeface="Segoe UI Black" panose="020B0A02040204020203" pitchFamily="34" charset="0"/>
+              </a:rPr>
+              <a:t>ММЗ — </a:t>
+            </a:r>
+            <a:r>
+              <a:rPr sz="2300" dirty="0" err="1">
                 <a:latin typeface="Segoe UI Black" panose="020B0A02040204020203" pitchFamily="34" charset="0"/>
                 <a:ea typeface="Segoe UI Black" panose="020B0A02040204020203" pitchFamily="34" charset="0"/>
               </a:rPr>
               <a:t>управление</a:t>
             </a:r>
             <a:r>
-              <a:rPr sz="2400" dirty="0">
+              <a:rPr sz="2300" dirty="0">
                 <a:latin typeface="Segoe UI Black" panose="020B0A02040204020203" pitchFamily="34" charset="0"/>
                 <a:ea typeface="Segoe UI Black" panose="020B0A02040204020203" pitchFamily="34" charset="0"/>
               </a:rPr>
               <a:t> </a:t>
             </a:r>
             <a:r>
-              <a:rPr sz="2400" dirty="0" err="1">
+              <a:rPr sz="2300" dirty="0" err="1">
                 <a:latin typeface="Segoe UI Black" panose="020B0A02040204020203" pitchFamily="34" charset="0"/>
                 <a:ea typeface="Segoe UI Black" panose="020B0A02040204020203" pitchFamily="34" charset="0"/>
               </a:rPr>
               <a:t>производством</a:t>
             </a:r>
-            <a:endParaRPr sz="2400" dirty="0">
+            <a:endParaRPr sz="2300" dirty="0">
               <a:latin typeface="Segoe UI Black" panose="020B0A02040204020203" pitchFamily="34" charset="0"/>
               <a:ea typeface="Segoe UI Black" panose="020B0A02040204020203" pitchFamily="34" charset="0"/>
             </a:endParaRPr>
@@ -7231,48 +7255,62 @@
               </a:defRPr>
             </a:pPr>
             <a:r>
-              <a:rPr sz="2400" dirty="0">
-                <a:latin typeface="Segoe UI Black" panose="020B0A02040204020203" pitchFamily="34" charset="0"/>
-                <a:ea typeface="Segoe UI Black" panose="020B0A02040204020203" pitchFamily="34" charset="0"/>
-              </a:rPr>
-              <a:t>   IPS Search — </a:t>
-            </a:r>
-            <a:r>
-              <a:rPr sz="2400" dirty="0" err="1">
+              <a:rPr sz="2300" dirty="0">
+                <a:latin typeface="Segoe UI Black" panose="020B0A02040204020203" pitchFamily="34" charset="0"/>
+                <a:ea typeface="Segoe UI Black" panose="020B0A02040204020203" pitchFamily="34" charset="0"/>
+              </a:rPr>
+              <a:t>  </a:t>
+            </a:r>
+            <a:r>
+              <a:rPr sz="2300" dirty="0" smtClean="0">
+                <a:latin typeface="Segoe UI Black" panose="020B0A02040204020203" pitchFamily="34" charset="0"/>
+                <a:ea typeface="Segoe UI Black" panose="020B0A02040204020203" pitchFamily="34" charset="0"/>
+              </a:rPr>
+              <a:t>IPS </a:t>
+            </a:r>
+            <a:r>
+              <a:rPr sz="2300" dirty="0">
+                <a:latin typeface="Segoe UI Black" panose="020B0A02040204020203" pitchFamily="34" charset="0"/>
+                <a:ea typeface="Segoe UI Black" panose="020B0A02040204020203" pitchFamily="34" charset="0"/>
+              </a:rPr>
+              <a:t>Search — </a:t>
+            </a:r>
+            <a:r>
+              <a:rPr sz="2300" dirty="0" err="1">
                 <a:latin typeface="Segoe UI Black" panose="020B0A02040204020203" pitchFamily="34" charset="0"/>
                 <a:ea typeface="Segoe UI Black" panose="020B0A02040204020203" pitchFamily="34" charset="0"/>
               </a:rPr>
               <a:t>поиск</a:t>
             </a:r>
             <a:r>
-              <a:rPr sz="2400" dirty="0">
+              <a:rPr sz="2300" dirty="0">
                 <a:latin typeface="Segoe UI Black" panose="020B0A02040204020203" pitchFamily="34" charset="0"/>
                 <a:ea typeface="Segoe UI Black" panose="020B0A02040204020203" pitchFamily="34" charset="0"/>
               </a:rPr>
               <a:t> </a:t>
             </a:r>
             <a:r>
-              <a:rPr sz="2400" dirty="0" err="1">
+              <a:rPr sz="2300" dirty="0" err="1">
                 <a:latin typeface="Segoe UI Black" panose="020B0A02040204020203" pitchFamily="34" charset="0"/>
                 <a:ea typeface="Segoe UI Black" panose="020B0A02040204020203" pitchFamily="34" charset="0"/>
               </a:rPr>
               <a:t>нормативно-справочной</a:t>
             </a:r>
             <a:r>
-              <a:rPr sz="2400" dirty="0">
+              <a:rPr sz="2300" dirty="0">
                 <a:latin typeface="Segoe UI Black" panose="020B0A02040204020203" pitchFamily="34" charset="0"/>
                 <a:ea typeface="Segoe UI Black" panose="020B0A02040204020203" pitchFamily="34" charset="0"/>
               </a:rPr>
               <a:t> </a:t>
             </a:r>
             <a:r>
-              <a:rPr sz="2400" dirty="0" err="1">
+              <a:rPr sz="2300" dirty="0" err="1">
                 <a:latin typeface="Segoe UI Black" panose="020B0A02040204020203" pitchFamily="34" charset="0"/>
                 <a:ea typeface="Segoe UI Black" panose="020B0A02040204020203" pitchFamily="34" charset="0"/>
               </a:rPr>
               <a:t>информации</a:t>
             </a:r>
-            <a:endParaRPr sz="2400" dirty="0">
+            <a:endParaRPr sz="2300" dirty="0">
               <a:latin typeface="Segoe UI Black" panose="020B0A02040204020203" pitchFamily="34" charset="0"/>
               <a:ea typeface="Segoe UI Black" panose="020B0A02040204020203" pitchFamily="34" charset="0"/>
             </a:endParaRPr>
@@ -7290,34 +7328,48 @@
               </a:defRPr>
             </a:pPr>
             <a:r>
-              <a:rPr sz="2400" dirty="0">
-                <a:latin typeface="Segoe UI Black" panose="020B0A02040204020203" pitchFamily="34" charset="0"/>
-                <a:ea typeface="Segoe UI Black" panose="020B0A02040204020203" pitchFamily="34" charset="0"/>
-              </a:rPr>
-              <a:t>   1С:Документооборот — </a:t>
-            </a:r>
-            <a:r>
-              <a:rPr sz="2400" dirty="0" err="1">
+              <a:rPr sz="2300" dirty="0">
+                <a:latin typeface="Segoe UI Black" panose="020B0A02040204020203" pitchFamily="34" charset="0"/>
+                <a:ea typeface="Segoe UI Black" panose="020B0A02040204020203" pitchFamily="34" charset="0"/>
+              </a:rPr>
+              <a:t>  </a:t>
+            </a:r>
+            <a:r>
+              <a:rPr sz="2300" dirty="0" smtClean="0">
+                <a:latin typeface="Segoe UI Black" panose="020B0A02040204020203" pitchFamily="34" charset="0"/>
+                <a:ea typeface="Segoe UI Black" panose="020B0A02040204020203" pitchFamily="34" charset="0"/>
+              </a:rPr>
+              <a:t>1С:Документооборот </a:t>
+            </a:r>
+            <a:r>
+              <a:rPr sz="2300" dirty="0">
+                <a:latin typeface="Segoe UI Black" panose="020B0A02040204020203" pitchFamily="34" charset="0"/>
+                <a:ea typeface="Segoe UI Black" panose="020B0A02040204020203" pitchFamily="34" charset="0"/>
+              </a:rPr>
+              <a:t>— </a:t>
+            </a:r>
+            <a:r>
+              <a:rPr sz="2300" dirty="0" err="1">
                 <a:latin typeface="Segoe UI Black" panose="020B0A02040204020203" pitchFamily="34" charset="0"/>
                 <a:ea typeface="Segoe UI Black" panose="020B0A02040204020203" pitchFamily="34" charset="0"/>
               </a:rPr>
               <a:t>управление</a:t>
             </a:r>
             <a:r>
-              <a:rPr sz="2400" dirty="0">
+              <a:rPr sz="2300" dirty="0">
                 <a:latin typeface="Segoe UI Black" panose="020B0A02040204020203" pitchFamily="34" charset="0"/>
                 <a:ea typeface="Segoe UI Black" panose="020B0A02040204020203" pitchFamily="34" charset="0"/>
               </a:rPr>
               <a:t> </a:t>
             </a:r>
             <a:r>
-              <a:rPr sz="2400" dirty="0" err="1" smtClean="0">
+              <a:rPr sz="2300" dirty="0" err="1" smtClean="0">
                 <a:latin typeface="Segoe UI Black" panose="020B0A02040204020203" pitchFamily="34" charset="0"/>
                 <a:ea typeface="Segoe UI Black" panose="020B0A02040204020203" pitchFamily="34" charset="0"/>
               </a:rPr>
               <a:t>документацией</a:t>
             </a:r>
-            <a:endParaRPr lang="ru-RU" sz="2400" dirty="0" smtClean="0">
+            <a:endParaRPr lang="en-US" sz="2300" dirty="0">
               <a:latin typeface="Segoe UI Black" panose="020B0A02040204020203" pitchFamily="34" charset="0"/>
               <a:ea typeface="Segoe UI Black" panose="020B0A02040204020203" pitchFamily="34" charset="0"/>
             </a:endParaRPr>
@@ -7334,7 +7386,7 @@
                 <a:latin typeface="Segoe UI"/>
               </a:defRPr>
             </a:pPr>
-            <a:endParaRPr sz="2400" dirty="0">
+            <a:endParaRPr sz="2300" dirty="0">
               <a:latin typeface="Segoe UI Black" panose="020B0A02040204020203" pitchFamily="34" charset="0"/>
               <a:ea typeface="Segoe UI Black" panose="020B0A02040204020203" pitchFamily="34" charset="0"/>
             </a:endParaRPr>
@@ -7352,131 +7404,135 @@
               </a:defRPr>
             </a:pPr>
             <a:r>
-              <a:rPr sz="2400" dirty="0" err="1">
+              <a:rPr sz="2300" dirty="0" err="1">
                 <a:latin typeface="Segoe UI Black" panose="020B0A02040204020203" pitchFamily="34" charset="0"/>
                 <a:ea typeface="Segoe UI Black" panose="020B0A02040204020203" pitchFamily="34" charset="0"/>
               </a:rPr>
               <a:t>Один</a:t>
             </a:r>
             <a:r>
-              <a:rPr sz="2400" dirty="0">
+              <a:rPr sz="2300" dirty="0">
                 <a:latin typeface="Segoe UI Black" panose="020B0A02040204020203" pitchFamily="34" charset="0"/>
                 <a:ea typeface="Segoe UI Black" panose="020B0A02040204020203" pitchFamily="34" charset="0"/>
               </a:rPr>
               <a:t> и </a:t>
             </a:r>
             <a:r>
-              <a:rPr sz="2400" dirty="0" err="1">
+              <a:rPr sz="2300" dirty="0" err="1">
                 <a:latin typeface="Segoe UI Black" panose="020B0A02040204020203" pitchFamily="34" charset="0"/>
                 <a:ea typeface="Segoe UI Black" panose="020B0A02040204020203" pitchFamily="34" charset="0"/>
               </a:rPr>
               <a:t>тот</a:t>
             </a:r>
             <a:r>
-              <a:rPr sz="2400" dirty="0">
+              <a:rPr sz="2300" dirty="0">
                 <a:latin typeface="Segoe UI Black" panose="020B0A02040204020203" pitchFamily="34" charset="0"/>
                 <a:ea typeface="Segoe UI Black" panose="020B0A02040204020203" pitchFamily="34" charset="0"/>
               </a:rPr>
               <a:t> </a:t>
             </a:r>
             <a:r>
-              <a:rPr sz="2400" dirty="0" err="1">
+              <a:rPr sz="2300" dirty="0" err="1">
                 <a:latin typeface="Segoe UI Black" panose="020B0A02040204020203" pitchFamily="34" charset="0"/>
                 <a:ea typeface="Segoe UI Black" panose="020B0A02040204020203" pitchFamily="34" charset="0"/>
               </a:rPr>
               <a:t>же</a:t>
             </a:r>
             <a:r>
-              <a:rPr sz="2400" dirty="0">
+              <a:rPr sz="2300" dirty="0">
                 <a:latin typeface="Segoe UI Black" panose="020B0A02040204020203" pitchFamily="34" charset="0"/>
                 <a:ea typeface="Segoe UI Black" panose="020B0A02040204020203" pitchFamily="34" charset="0"/>
               </a:rPr>
               <a:t> </a:t>
             </a:r>
             <a:r>
-              <a:rPr sz="2400" dirty="0" err="1">
+              <a:rPr sz="2300" dirty="0" err="1">
                 <a:latin typeface="Segoe UI Black" panose="020B0A02040204020203" pitchFamily="34" charset="0"/>
                 <a:ea typeface="Segoe UI Black" panose="020B0A02040204020203" pitchFamily="34" charset="0"/>
               </a:rPr>
               <a:t>материал</a:t>
             </a:r>
             <a:r>
-              <a:rPr sz="2400" dirty="0">
+              <a:rPr sz="2300" dirty="0">
                 <a:latin typeface="Segoe UI Black" panose="020B0A02040204020203" pitchFamily="34" charset="0"/>
                 <a:ea typeface="Segoe UI Black" panose="020B0A02040204020203" pitchFamily="34" charset="0"/>
               </a:rPr>
               <a:t> </a:t>
             </a:r>
             <a:r>
-              <a:rPr sz="2400" dirty="0" err="1">
+              <a:rPr sz="2300" dirty="0" err="1">
                 <a:latin typeface="Segoe UI Black" panose="020B0A02040204020203" pitchFamily="34" charset="0"/>
                 <a:ea typeface="Segoe UI Black" panose="020B0A02040204020203" pitchFamily="34" charset="0"/>
               </a:rPr>
               <a:t>имеет</a:t>
             </a:r>
             <a:r>
-              <a:rPr sz="2400" dirty="0">
+              <a:rPr sz="2300" dirty="0">
                 <a:latin typeface="Segoe UI Black" panose="020B0A02040204020203" pitchFamily="34" charset="0"/>
                 <a:ea typeface="Segoe UI Black" panose="020B0A02040204020203" pitchFamily="34" charset="0"/>
               </a:rPr>
               <a:t> </a:t>
             </a:r>
             <a:r>
-              <a:rPr sz="2400" dirty="0" err="1">
+              <a:rPr sz="2300" dirty="0" err="1">
                 <a:latin typeface="Segoe UI Black" panose="020B0A02040204020203" pitchFamily="34" charset="0"/>
                 <a:ea typeface="Segoe UI Black" panose="020B0A02040204020203" pitchFamily="34" charset="0"/>
               </a:rPr>
               <a:t>разные</a:t>
             </a:r>
             <a:r>
-              <a:rPr sz="2400" dirty="0">
+              <a:rPr sz="2300" dirty="0">
                 <a:latin typeface="Segoe UI Black" panose="020B0A02040204020203" pitchFamily="34" charset="0"/>
                 <a:ea typeface="Segoe UI Black" panose="020B0A02040204020203" pitchFamily="34" charset="0"/>
               </a:rPr>
               <a:t> </a:t>
             </a:r>
             <a:r>
-              <a:rPr sz="2400" dirty="0" err="1">
+              <a:rPr sz="2300" dirty="0" err="1">
                 <a:latin typeface="Segoe UI Black" panose="020B0A02040204020203" pitchFamily="34" charset="0"/>
                 <a:ea typeface="Segoe UI Black" panose="020B0A02040204020203" pitchFamily="34" charset="0"/>
               </a:rPr>
               <a:t>названия</a:t>
             </a:r>
             <a:r>
-              <a:rPr sz="2400" dirty="0">
+              <a:rPr sz="2300" dirty="0">
                 <a:latin typeface="Segoe UI Black" panose="020B0A02040204020203" pitchFamily="34" charset="0"/>
                 <a:ea typeface="Segoe UI Black" panose="020B0A02040204020203" pitchFamily="34" charset="0"/>
               </a:rPr>
               <a:t> в </a:t>
             </a:r>
             <a:r>
-              <a:rPr sz="2400" dirty="0" err="1">
+              <a:rPr sz="2300" dirty="0" err="1">
                 <a:latin typeface="Segoe UI Black" panose="020B0A02040204020203" pitchFamily="34" charset="0"/>
                 <a:ea typeface="Segoe UI Black" panose="020B0A02040204020203" pitchFamily="34" charset="0"/>
               </a:rPr>
               <a:t>разных</a:t>
             </a:r>
             <a:r>
-              <a:rPr sz="2400" dirty="0">
+              <a:rPr sz="2300" dirty="0">
                 <a:latin typeface="Segoe UI Black" panose="020B0A02040204020203" pitchFamily="34" charset="0"/>
                 <a:ea typeface="Segoe UI Black" panose="020B0A02040204020203" pitchFamily="34" charset="0"/>
               </a:rPr>
               <a:t> </a:t>
             </a:r>
             <a:r>
-              <a:rPr sz="2400" dirty="0" err="1">
+              <a:rPr sz="2300" dirty="0" err="1">
                 <a:latin typeface="Segoe UI Black" panose="020B0A02040204020203" pitchFamily="34" charset="0"/>
                 <a:ea typeface="Segoe UI Black" panose="020B0A02040204020203" pitchFamily="34" charset="0"/>
               </a:rPr>
               <a:t>системах</a:t>
             </a:r>
             <a:r>
-              <a:rPr sz="2400" dirty="0">
+              <a:rPr sz="2300" dirty="0" smtClean="0">
                 <a:latin typeface="Segoe UI Black" panose="020B0A02040204020203" pitchFamily="34" charset="0"/>
                 <a:ea typeface="Segoe UI Black" panose="020B0A02040204020203" pitchFamily="34" charset="0"/>
               </a:rPr>
               <a:t>.</a:t>
             </a:r>
+            <a:endParaRPr lang="en-US" sz="2300" dirty="0" smtClean="0">
+              <a:latin typeface="Segoe UI Black" panose="020B0A02040204020203" pitchFamily="34" charset="0"/>
+              <a:ea typeface="Segoe UI Black" panose="020B0A02040204020203" pitchFamily="34" charset="0"/>
+            </a:endParaRPr>
           </a:p>
           <a:p>
             <a:pPr>
@@ -7490,190 +7546,207 @@
                 <a:latin typeface="Segoe UI"/>
               </a:defRPr>
             </a:pPr>
-            <a:r>
-              <a:rPr sz="2400" dirty="0" err="1">
+            <a:endParaRPr sz="2300" dirty="0">
+              <a:latin typeface="Segoe UI Black" panose="020B0A02040204020203" pitchFamily="34" charset="0"/>
+              <a:ea typeface="Segoe UI Black" panose="020B0A02040204020203" pitchFamily="34" charset="0"/>
+            </a:endParaRPr>
+          </a:p>
+          <a:p>
+            <a:pPr>
+              <a:spcAft>
+                <a:spcPts val="480"/>
+              </a:spcAft>
+              <a:defRPr sz="1600">
+                <a:solidFill>
+                  <a:srgbClr val="333333"/>
+                </a:solidFill>
+                <a:latin typeface="Segoe UI"/>
+              </a:defRPr>
+            </a:pPr>
+            <a:r>
+              <a:rPr sz="2300" dirty="0" err="1">
                 <a:latin typeface="Segoe UI Black" panose="020B0A02040204020203" pitchFamily="34" charset="0"/>
                 <a:ea typeface="Segoe UI Black" panose="020B0A02040204020203" pitchFamily="34" charset="0"/>
               </a:rPr>
               <a:t>Нет</a:t>
             </a:r>
             <a:r>
-              <a:rPr sz="2400" dirty="0">
+              <a:rPr sz="2300" dirty="0">
                 <a:latin typeface="Segoe UI Black" panose="020B0A02040204020203" pitchFamily="34" charset="0"/>
                 <a:ea typeface="Segoe UI Black" panose="020B0A02040204020203" pitchFamily="34" charset="0"/>
               </a:rPr>
               <a:t> </a:t>
             </a:r>
             <a:r>
-              <a:rPr sz="2400" dirty="0" err="1">
+              <a:rPr sz="2300" dirty="0" err="1">
                 <a:latin typeface="Segoe UI Black" panose="020B0A02040204020203" pitchFamily="34" charset="0"/>
                 <a:ea typeface="Segoe UI Black" panose="020B0A02040204020203" pitchFamily="34" charset="0"/>
               </a:rPr>
               <a:t>единого</a:t>
             </a:r>
             <a:r>
-              <a:rPr sz="2400" dirty="0">
+              <a:rPr sz="2300" dirty="0">
                 <a:latin typeface="Segoe UI Black" panose="020B0A02040204020203" pitchFamily="34" charset="0"/>
                 <a:ea typeface="Segoe UI Black" panose="020B0A02040204020203" pitchFamily="34" charset="0"/>
               </a:rPr>
               <a:t> </a:t>
             </a:r>
             <a:r>
-              <a:rPr sz="2400" dirty="0" err="1">
+              <a:rPr sz="2300" dirty="0" err="1">
                 <a:latin typeface="Segoe UI Black" panose="020B0A02040204020203" pitchFamily="34" charset="0"/>
                 <a:ea typeface="Segoe UI Black" panose="020B0A02040204020203" pitchFamily="34" charset="0"/>
               </a:rPr>
               <a:t>источника</a:t>
             </a:r>
             <a:r>
-              <a:rPr sz="2400" dirty="0">
+              <a:rPr sz="2300" dirty="0">
                 <a:latin typeface="Segoe UI Black" panose="020B0A02040204020203" pitchFamily="34" charset="0"/>
                 <a:ea typeface="Segoe UI Black" panose="020B0A02040204020203" pitchFamily="34" charset="0"/>
               </a:rPr>
               <a:t> </a:t>
             </a:r>
             <a:r>
-              <a:rPr sz="2400" dirty="0" err="1">
+              <a:rPr sz="2300" dirty="0" err="1">
                 <a:latin typeface="Segoe UI Black" panose="020B0A02040204020203" pitchFamily="34" charset="0"/>
                 <a:ea typeface="Segoe UI Black" panose="020B0A02040204020203" pitchFamily="34" charset="0"/>
               </a:rPr>
               <a:t>правды</a:t>
             </a:r>
             <a:r>
-              <a:rPr sz="2400" dirty="0">
+              <a:rPr sz="2300" dirty="0">
                 <a:latin typeface="Segoe UI Black" panose="020B0A02040204020203" pitchFamily="34" charset="0"/>
                 <a:ea typeface="Segoe UI Black" panose="020B0A02040204020203" pitchFamily="34" charset="0"/>
               </a:rPr>
               <a:t> — </a:t>
             </a:r>
             <a:r>
-              <a:rPr sz="2400" dirty="0" err="1">
+              <a:rPr sz="2300" dirty="0" err="1">
                 <a:latin typeface="Segoe UI Black" panose="020B0A02040204020203" pitchFamily="34" charset="0"/>
                 <a:ea typeface="Segoe UI Black" panose="020B0A02040204020203" pitchFamily="34" charset="0"/>
               </a:rPr>
               <a:t>ручная</a:t>
             </a:r>
             <a:r>
-              <a:rPr sz="2400" dirty="0">
+              <a:rPr sz="2300" dirty="0">
                 <a:latin typeface="Segoe UI Black" panose="020B0A02040204020203" pitchFamily="34" charset="0"/>
                 <a:ea typeface="Segoe UI Black" panose="020B0A02040204020203" pitchFamily="34" charset="0"/>
               </a:rPr>
               <a:t> </a:t>
             </a:r>
             <a:r>
-              <a:rPr sz="2400" dirty="0" err="1">
+              <a:rPr sz="2300" dirty="0" err="1">
                 <a:latin typeface="Segoe UI Black" panose="020B0A02040204020203" pitchFamily="34" charset="0"/>
                 <a:ea typeface="Segoe UI Black" panose="020B0A02040204020203" pitchFamily="34" charset="0"/>
               </a:rPr>
               <a:t>синхронизация</a:t>
             </a:r>
             <a:r>
-              <a:rPr sz="2400" dirty="0">
+              <a:rPr sz="2300" dirty="0">
                 <a:latin typeface="Segoe UI Black" panose="020B0A02040204020203" pitchFamily="34" charset="0"/>
                 <a:ea typeface="Segoe UI Black" panose="020B0A02040204020203" pitchFamily="34" charset="0"/>
               </a:rPr>
               <a:t> </a:t>
             </a:r>
             <a:r>
-              <a:rPr sz="2400" dirty="0" err="1">
+              <a:rPr sz="2300" dirty="0" err="1">
                 <a:latin typeface="Segoe UI Black" panose="020B0A02040204020203" pitchFamily="34" charset="0"/>
                 <a:ea typeface="Segoe UI Black" panose="020B0A02040204020203" pitchFamily="34" charset="0"/>
               </a:rPr>
               <a:t>приводит</a:t>
             </a:r>
             <a:r>
-              <a:rPr sz="2400" dirty="0">
+              <a:rPr sz="2300" dirty="0">
                 <a:latin typeface="Segoe UI Black" panose="020B0A02040204020203" pitchFamily="34" charset="0"/>
                 <a:ea typeface="Segoe UI Black" panose="020B0A02040204020203" pitchFamily="34" charset="0"/>
               </a:rPr>
               <a:t> </a:t>
             </a:r>
             <a:r>
-              <a:rPr sz="2400" dirty="0" smtClean="0">
+              <a:rPr sz="2300" dirty="0" smtClean="0">
                 <a:latin typeface="Segoe UI Black" panose="020B0A02040204020203" pitchFamily="34" charset="0"/>
                 <a:ea typeface="Segoe UI Black" panose="020B0A02040204020203" pitchFamily="34" charset="0"/>
               </a:rPr>
               <a:t>к</a:t>
             </a:r>
             <a:r>
-              <a:rPr lang="ru-RU" sz="2400" dirty="0" smtClean="0">
+              <a:rPr lang="ru-RU" sz="2300" dirty="0" smtClean="0">
                 <a:latin typeface="Segoe UI Black" panose="020B0A02040204020203" pitchFamily="34" charset="0"/>
                 <a:ea typeface="Segoe UI Black" panose="020B0A02040204020203" pitchFamily="34" charset="0"/>
               </a:rPr>
               <a:t> </a:t>
             </a:r>
             <a:r>
-              <a:rPr sz="2400" dirty="0" err="1" smtClean="0">
+              <a:rPr sz="2300" dirty="0" err="1" smtClean="0">
                 <a:latin typeface="Segoe UI Black" panose="020B0A02040204020203" pitchFamily="34" charset="0"/>
                 <a:ea typeface="Segoe UI Black" panose="020B0A02040204020203" pitchFamily="34" charset="0"/>
               </a:rPr>
               <a:t>ошибкам</a:t>
             </a:r>
             <a:r>
-              <a:rPr sz="2400" dirty="0" smtClean="0">
+              <a:rPr sz="2300" dirty="0" smtClean="0">
                 <a:latin typeface="Segoe UI Black" panose="020B0A02040204020203" pitchFamily="34" charset="0"/>
                 <a:ea typeface="Segoe UI Black" panose="020B0A02040204020203" pitchFamily="34" charset="0"/>
               </a:rPr>
               <a:t> </a:t>
             </a:r>
             <a:r>
-              <a:rPr sz="2400" dirty="0">
+              <a:rPr sz="2300" dirty="0">
                 <a:latin typeface="Segoe UI Black" panose="020B0A02040204020203" pitchFamily="34" charset="0"/>
                 <a:ea typeface="Segoe UI Black" panose="020B0A02040204020203" pitchFamily="34" charset="0"/>
               </a:rPr>
               <a:t>в </a:t>
             </a:r>
             <a:r>
-              <a:rPr sz="2400" dirty="0" err="1">
+              <a:rPr sz="2300" dirty="0" err="1">
                 <a:latin typeface="Segoe UI Black" panose="020B0A02040204020203" pitchFamily="34" charset="0"/>
                 <a:ea typeface="Segoe UI Black" panose="020B0A02040204020203" pitchFamily="34" charset="0"/>
               </a:rPr>
               <a:t>закупках</a:t>
             </a:r>
             <a:r>
-              <a:rPr sz="2400" dirty="0">
+              <a:rPr sz="2300" dirty="0">
                 <a:latin typeface="Segoe UI Black" panose="020B0A02040204020203" pitchFamily="34" charset="0"/>
                 <a:ea typeface="Segoe UI Black" panose="020B0A02040204020203" pitchFamily="34" charset="0"/>
               </a:rPr>
               <a:t>, </a:t>
             </a:r>
             <a:r>
-              <a:rPr sz="2400" dirty="0" err="1">
+              <a:rPr sz="2300" dirty="0" err="1">
                 <a:latin typeface="Segoe UI Black" panose="020B0A02040204020203" pitchFamily="34" charset="0"/>
                 <a:ea typeface="Segoe UI Black" panose="020B0A02040204020203" pitchFamily="34" charset="0"/>
               </a:rPr>
               <a:t>отгрузках</a:t>
             </a:r>
             <a:r>
-              <a:rPr sz="2400" dirty="0">
+              <a:rPr sz="2300" dirty="0">
                 <a:latin typeface="Segoe UI Black" panose="020B0A02040204020203" pitchFamily="34" charset="0"/>
                 <a:ea typeface="Segoe UI Black" panose="020B0A02040204020203" pitchFamily="34" charset="0"/>
               </a:rPr>
               <a:t> и </a:t>
             </a:r>
             <a:r>
-              <a:rPr sz="2400" dirty="0" err="1">
+              <a:rPr sz="2300" dirty="0" err="1">
                 <a:latin typeface="Segoe UI Black" panose="020B0A02040204020203" pitchFamily="34" charset="0"/>
                 <a:ea typeface="Segoe UI Black" panose="020B0A02040204020203" pitchFamily="34" charset="0"/>
               </a:rPr>
               <a:t>производственном</a:t>
             </a:r>
             <a:r>
-              <a:rPr sz="2400" dirty="0">
+              <a:rPr sz="2300" dirty="0">
                 <a:latin typeface="Segoe UI Black" panose="020B0A02040204020203" pitchFamily="34" charset="0"/>
                 <a:ea typeface="Segoe UI Black" panose="020B0A02040204020203" pitchFamily="34" charset="0"/>
               </a:rPr>
               <a:t> </a:t>
             </a:r>
             <a:r>
-              <a:rPr sz="2400" dirty="0" err="1">
+              <a:rPr sz="2300" dirty="0" err="1">
                 <a:latin typeface="Segoe UI Black" panose="020B0A02040204020203" pitchFamily="34" charset="0"/>
                 <a:ea typeface="Segoe UI Black" panose="020B0A02040204020203" pitchFamily="34" charset="0"/>
               </a:rPr>
               <a:t>учёте</a:t>
             </a:r>
             <a:r>
-              <a:rPr sz="2400" dirty="0">
+              <a:rPr sz="2300" dirty="0">
                 <a:latin typeface="Segoe UI Black" panose="020B0A02040204020203" pitchFamily="34" charset="0"/>
                 <a:ea typeface="Segoe UI Black" panose="020B0A02040204020203" pitchFamily="34" charset="0"/>
               </a:rPr>
@@ -7690,7 +7763,7 @@
         </p:nvSpPr>
         <p:spPr>
           <a:xfrm>
-            <a:off x="10840870" y="6054593"/>
+            <a:off x="11190195" y="6229936"/>
             <a:ext cx="686406" cy="369332"/>
           </a:xfrm>
           <a:prstGeom prst="rect">
@@ -7816,8 +7889,8 @@
         </p:nvSpPr>
         <p:spPr>
           <a:xfrm>
-            <a:off x="2846070" y="148977"/>
-            <a:ext cx="10698480" cy="707886"/>
+            <a:off x="3341518" y="179754"/>
+            <a:ext cx="5508658" cy="646331"/>
           </a:xfrm>
           <a:prstGeom prst="rect">
             <a:avLst/>
@@ -7839,10 +7912,10 @@
               </a:defRPr>
             </a:pPr>
             <a:r>
-              <a:rPr lang="ru-RU" sz="4000" dirty="0" smtClean="0"/>
+              <a:rPr lang="ru-RU" sz="3600" dirty="0" smtClean="0"/>
               <a:t>Создание справочника</a:t>
             </a:r>
-            <a:endParaRPr sz="4000" dirty="0"/>
+            <a:endParaRPr sz="3600" dirty="0"/>
           </a:p>
         </p:txBody>
       </p:sp>
@@ -8026,8 +8099,8 @@
         </p:nvSpPr>
         <p:spPr>
           <a:xfrm>
-            <a:off x="2397651" y="148977"/>
-            <a:ext cx="7396392" cy="707886"/>
+            <a:off x="2809453" y="148976"/>
+            <a:ext cx="6573094" cy="646331"/>
           </a:xfrm>
           <a:prstGeom prst="rect">
             <a:avLst/>
@@ -8049,10 +8122,10 @@
               </a:defRPr>
             </a:pPr>
             <a:r>
-              <a:rPr lang="ru-RU" sz="4000" dirty="0" smtClean="0"/>
+              <a:rPr lang="ru-RU" sz="3600" dirty="0" smtClean="0"/>
               <a:t>Просмотр классификаторов</a:t>
             </a:r>
-            <a:endParaRPr sz="4000" dirty="0"/>
+            <a:endParaRPr sz="3600" dirty="0"/>
           </a:p>
         </p:txBody>
       </p:sp>
@@ -8236,8 +8309,8 @@
         </p:nvSpPr>
         <p:spPr>
           <a:xfrm>
-            <a:off x="2397651" y="148977"/>
-            <a:ext cx="7396392" cy="707886"/>
+            <a:off x="3213561" y="143950"/>
+            <a:ext cx="5764572" cy="646331"/>
           </a:xfrm>
           <a:prstGeom prst="rect">
             <a:avLst/>
@@ -8259,10 +8332,10 @@
               </a:defRPr>
             </a:pPr>
             <a:r>
-              <a:rPr lang="ru-RU" sz="4000" dirty="0" smtClean="0"/>
+              <a:rPr lang="ru-RU" sz="3600" dirty="0" smtClean="0"/>
               <a:t>Декодирование шифров</a:t>
             </a:r>
-            <a:endParaRPr sz="4000" dirty="0"/>
+            <a:endParaRPr sz="3600" dirty="0"/>
           </a:p>
         </p:txBody>
       </p:sp>
@@ -8446,8 +8519,8 @@
         </p:nvSpPr>
         <p:spPr>
           <a:xfrm>
-            <a:off x="4554011" y="148977"/>
-            <a:ext cx="3262161" cy="707886"/>
+            <a:off x="4633286" y="179754"/>
+            <a:ext cx="2924818" cy="646331"/>
           </a:xfrm>
           <a:prstGeom prst="rect">
             <a:avLst/>
@@ -8469,10 +8542,10 @@
               </a:defRPr>
             </a:pPr>
             <a:r>
-              <a:rPr sz="4000" dirty="0" err="1" smtClean="0"/>
+              <a:rPr sz="3600" dirty="0" err="1" smtClean="0"/>
               <a:t>Интеграция</a:t>
             </a:r>
-            <a:endParaRPr sz="4000" dirty="0"/>
+            <a:endParaRPr sz="3600" dirty="0"/>
           </a:p>
         </p:txBody>
       </p:sp>
@@ -8656,8 +8729,8 @@
         </p:nvSpPr>
         <p:spPr>
           <a:xfrm>
-            <a:off x="4075660" y="132584"/>
-            <a:ext cx="4040374" cy="707886"/>
+            <a:off x="4298162" y="179754"/>
+            <a:ext cx="3595675" cy="646331"/>
           </a:xfrm>
           <a:prstGeom prst="rect">
             <a:avLst/>
@@ -8679,10 +8752,10 @@
               </a:defRPr>
             </a:pPr>
             <a:r>
-              <a:rPr lang="ru-RU" sz="4000" dirty="0" smtClean="0"/>
+              <a:rPr lang="ru-RU" sz="3600" dirty="0" smtClean="0"/>
               <a:t>Обмен данных</a:t>
             </a:r>
-            <a:endParaRPr sz="4000" dirty="0"/>
+            <a:endParaRPr sz="3600" dirty="0"/>
           </a:p>
         </p:txBody>
       </p:sp>
@@ -8866,8 +8939,8 @@
         </p:nvSpPr>
         <p:spPr>
           <a:xfrm>
-            <a:off x="5194340" y="148977"/>
-            <a:ext cx="1803013" cy="707886"/>
+            <a:off x="5295299" y="179754"/>
+            <a:ext cx="1601096" cy="646331"/>
           </a:xfrm>
           <a:prstGeom prst="rect">
             <a:avLst/>
@@ -8889,10 +8962,10 @@
               </a:defRPr>
             </a:pPr>
             <a:r>
-              <a:rPr lang="ru-RU" sz="4000" dirty="0" smtClean="0"/>
+              <a:rPr lang="ru-RU" sz="3600" dirty="0" smtClean="0"/>
               <a:t>Аудит</a:t>
             </a:r>
-            <a:endParaRPr sz="4000" dirty="0"/>
+            <a:endParaRPr sz="3600" dirty="0"/>
           </a:p>
         </p:txBody>
       </p:sp>
@@ -9076,8 +9149,8 @@
         </p:nvSpPr>
         <p:spPr>
           <a:xfrm>
-            <a:off x="4447485" y="148977"/>
-            <a:ext cx="3461101" cy="707886"/>
+            <a:off x="4575362" y="148977"/>
+            <a:ext cx="3040970" cy="646331"/>
           </a:xfrm>
           <a:prstGeom prst="rect">
             <a:avLst/>
@@ -9099,10 +9172,10 @@
               </a:defRPr>
             </a:pPr>
             <a:r>
-              <a:rPr lang="ru-RU" sz="4000" dirty="0" smtClean="0"/>
+              <a:rPr lang="ru-RU" sz="3600" dirty="0" smtClean="0"/>
               <a:t>Заключение</a:t>
             </a:r>
-            <a:endParaRPr dirty="0"/>
+            <a:endParaRPr sz="3600" dirty="0"/>
           </a:p>
         </p:txBody>
       </p:sp>
@@ -9881,8 +9954,8 @@
         </p:nvSpPr>
         <p:spPr>
           <a:xfrm>
-            <a:off x="4038924" y="148977"/>
-            <a:ext cx="4083671" cy="707886"/>
+            <a:off x="4322955" y="179754"/>
+            <a:ext cx="3545783" cy="646331"/>
           </a:xfrm>
           <a:prstGeom prst="rect">
             <a:avLst/>
@@ -9904,18 +9977,18 @@
               </a:defRPr>
             </a:pPr>
             <a:r>
-              <a:rPr sz="4000" dirty="0" err="1"/>
+              <a:rPr sz="3600" dirty="0" err="1"/>
               <a:t>Цель</a:t>
             </a:r>
             <a:r>
-              <a:rPr sz="4000" dirty="0"/>
+              <a:rPr sz="3600" dirty="0"/>
               <a:t> и </a:t>
             </a:r>
             <a:r>
-              <a:rPr sz="4000" dirty="0" err="1"/>
+              <a:rPr sz="3600" dirty="0" err="1"/>
               <a:t>задачи</a:t>
             </a:r>
-            <a:endParaRPr sz="4000" dirty="0"/>
+            <a:endParaRPr sz="3600" dirty="0"/>
           </a:p>
         </p:txBody>
       </p:sp>
@@ -10980,8 +11053,8 @@
         </p:nvSpPr>
         <p:spPr>
           <a:xfrm>
-            <a:off x="3697483" y="138133"/>
-            <a:ext cx="4492233" cy="731520"/>
+            <a:off x="4058389" y="179754"/>
+            <a:ext cx="4074916" cy="646331"/>
           </a:xfrm>
           <a:prstGeom prst="rect">
             <a:avLst/>
@@ -11003,18 +11076,18 @@
               </a:defRPr>
             </a:pPr>
             <a:r>
-              <a:rPr sz="4000" dirty="0" err="1"/>
+              <a:rPr sz="3600" dirty="0" err="1"/>
               <a:t>Анализ</a:t>
             </a:r>
             <a:r>
-              <a:rPr sz="4000" dirty="0"/>
+              <a:rPr sz="3600" dirty="0"/>
               <a:t> </a:t>
             </a:r>
             <a:r>
-              <a:rPr sz="4000" dirty="0" err="1"/>
+              <a:rPr sz="3600" dirty="0" err="1"/>
               <a:t>аналогов</a:t>
             </a:r>
-            <a:endParaRPr sz="4000" dirty="0"/>
+            <a:endParaRPr sz="3600" dirty="0"/>
           </a:p>
         </p:txBody>
       </p:sp>
@@ -12447,9 +12520,39 @@
                 <a:latin typeface="Segoe UI Black" panose="020B0A02040204020203" pitchFamily="34" charset="0"/>
                 <a:ea typeface="Segoe UI Black" panose="020B0A02040204020203" pitchFamily="34" charset="0"/>
               </a:rPr>
-              <a:t> —</a:t>
-            </a:r>
-            <a:br>
+              <a:t> </a:t>
+            </a:r>
+            <a:r>
+              <a:rPr sz="2400" dirty="0" smtClean="0">
+                <a:solidFill>
+                  <a:schemeClr val="tx2"/>
+                </a:solidFill>
+                <a:latin typeface="Segoe UI Black" panose="020B0A02040204020203" pitchFamily="34" charset="0"/>
+                <a:ea typeface="Segoe UI Black" panose="020B0A02040204020203" pitchFamily="34" charset="0"/>
+              </a:rPr>
+              <a:t>—</a:t>
+            </a:r>
+            <a:r>
+              <a:rPr lang="ru-RU" sz="2400" dirty="0" smtClean="0">
+                <a:solidFill>
+                  <a:schemeClr val="tx2"/>
+                </a:solidFill>
+                <a:latin typeface="Segoe UI Black" panose="020B0A02040204020203" pitchFamily="34" charset="0"/>
+                <a:ea typeface="Segoe UI Black" panose="020B0A02040204020203" pitchFamily="34" charset="0"/>
+              </a:rPr>
+              <a:t> </a:t>
+            </a:r>
+            <a:r>
+              <a:rPr sz="2400" dirty="0" err="1" smtClean="0">
+                <a:solidFill>
+                  <a:schemeClr val="tx2"/>
+                </a:solidFill>
+                <a:latin typeface="Segoe UI Black" panose="020B0A02040204020203" pitchFamily="34" charset="0"/>
+                <a:ea typeface="Segoe UI Black" panose="020B0A02040204020203" pitchFamily="34" charset="0"/>
+              </a:rPr>
+              <a:t>функция</a:t>
+            </a:r>
+            <a:r>
               <a:rPr sz="2400" dirty="0">
                 <a:solidFill>
                   <a:schemeClr val="tx2"/>
@@ -12457,16 +12560,44 @@
                 <a:latin typeface="Segoe UI Black" panose="020B0A02040204020203" pitchFamily="34" charset="0"/>
                 <a:ea typeface="Segoe UI Black" panose="020B0A02040204020203" pitchFamily="34" charset="0"/>
               </a:rPr>
-            </a:br>
-            <a:r>
-              <a:rPr sz="2400" dirty="0" err="1">
+              <a:t>, </a:t>
+            </a:r>
+            <a:endParaRPr lang="ru-RU" sz="2400" dirty="0" smtClean="0">
+              <a:solidFill>
+                <a:schemeClr val="tx2"/>
+              </a:solidFill>
+              <a:latin typeface="Segoe UI Black" panose="020B0A02040204020203" pitchFamily="34" charset="0"/>
+              <a:ea typeface="Segoe UI Black" panose="020B0A02040204020203" pitchFamily="34" charset="0"/>
+            </a:endParaRPr>
+          </a:p>
+          <a:p>
+            <a:pPr algn="l">
+              <a:defRPr sz="1500" b="0">
+                <a:solidFill>
+                  <a:srgbClr val="333333"/>
+                </a:solidFill>
+                <a:latin typeface="Segoe UI"/>
+              </a:defRPr>
+            </a:pPr>
+            <a:r>
+              <a:rPr sz="2400" dirty="0" err="1" smtClean="0">
                 <a:solidFill>
                   <a:schemeClr val="tx2"/>
                 </a:solidFill>
                 <a:latin typeface="Segoe UI Black" panose="020B0A02040204020203" pitchFamily="34" charset="0"/>
                 <a:ea typeface="Segoe UI Black" panose="020B0A02040204020203" pitchFamily="34" charset="0"/>
               </a:rPr>
-              <a:t>функция</a:t>
+              <a:t>отсутствующая</a:t>
+            </a:r>
+            <a:r>
+              <a:rPr sz="2400" dirty="0" smtClean="0">
+                <a:solidFill>
+                  <a:schemeClr val="tx2"/>
+                </a:solidFill>
+                <a:latin typeface="Segoe UI Black" panose="020B0A02040204020203" pitchFamily="34" charset="0"/>
+                <a:ea typeface="Segoe UI Black" panose="020B0A02040204020203" pitchFamily="34" charset="0"/>
+              </a:rPr>
+              <a:t> </a:t>
             </a:r>
             <a:r>
               <a:rPr sz="2400" dirty="0">
@@ -12476,27 +12607,7 @@
                 <a:latin typeface="Segoe UI Black" panose="020B0A02040204020203" pitchFamily="34" charset="0"/>
                 <a:ea typeface="Segoe UI Black" panose="020B0A02040204020203" pitchFamily="34" charset="0"/>
               </a:rPr>
-              <a:t>, </a:t>
-            </a:r>
-            <a:r>
-              <a:rPr sz="2400" dirty="0" err="1">
-                <a:solidFill>
-                  <a:schemeClr val="tx2"/>
-                </a:solidFill>
-                <a:latin typeface="Segoe UI Black" panose="020B0A02040204020203" pitchFamily="34" charset="0"/>
-                <a:ea typeface="Segoe UI Black" panose="020B0A02040204020203" pitchFamily="34" charset="0"/>
-              </a:rPr>
-              <a:t>отсутствующая</a:t>
-            </a:r>
-            <a:r>
-              <a:rPr sz="2400" dirty="0">
-                <a:solidFill>
-                  <a:schemeClr val="tx2"/>
-                </a:solidFill>
-                <a:latin typeface="Segoe UI Black" panose="020B0A02040204020203" pitchFamily="34" charset="0"/>
-                <a:ea typeface="Segoe UI Black" panose="020B0A02040204020203" pitchFamily="34" charset="0"/>
-              </a:rPr>
-              <a:t> в </a:t>
+              <a:t>в </a:t>
             </a:r>
             <a:r>
               <a:rPr sz="2400" dirty="0" err="1">
@@ -12674,8 +12785,8 @@
         </p:nvSpPr>
         <p:spPr>
           <a:xfrm>
-            <a:off x="3529195" y="137160"/>
-            <a:ext cx="4920250" cy="731520"/>
+            <a:off x="3854311" y="179754"/>
+            <a:ext cx="4459773" cy="646331"/>
           </a:xfrm>
           <a:prstGeom prst="rect">
             <a:avLst/>
@@ -12697,18 +12808,18 @@
               </a:defRPr>
             </a:pPr>
             <a:r>
-              <a:rPr sz="4000" dirty="0" err="1"/>
+              <a:rPr sz="3600" dirty="0" err="1"/>
               <a:t>Выбор</a:t>
             </a:r>
             <a:r>
-              <a:rPr sz="4000" dirty="0"/>
+              <a:rPr sz="3600" dirty="0"/>
               <a:t> </a:t>
             </a:r>
             <a:r>
-              <a:rPr sz="4000" dirty="0" err="1"/>
+              <a:rPr sz="3600" dirty="0" err="1"/>
               <a:t>технологий</a:t>
             </a:r>
-            <a:endParaRPr sz="4000" dirty="0"/>
+            <a:endParaRPr sz="3600" dirty="0"/>
           </a:p>
         </p:txBody>
       </p:sp>
@@ -14109,8 +14220,8 @@
         </p:nvSpPr>
         <p:spPr>
           <a:xfrm>
-            <a:off x="107309" y="272087"/>
-            <a:ext cx="12084691" cy="461665"/>
+            <a:off x="981778" y="179754"/>
+            <a:ext cx="10934298" cy="646331"/>
           </a:xfrm>
           <a:prstGeom prst="rect">
             <a:avLst/>
@@ -14132,30 +14243,18 @@
               </a:defRPr>
             </a:pPr>
             <a:r>
-              <a:rPr sz="2400" dirty="0" err="1"/>
-              <a:t>Архитектура</a:t>
-            </a:r>
-            <a:r>
-              <a:rPr sz="2400" dirty="0"/>
-              <a:t> </a:t>
-            </a:r>
-            <a:r>
-              <a:rPr sz="2400" dirty="0" err="1"/>
-              <a:t>системы</a:t>
-            </a:r>
-            <a:r>
-              <a:rPr sz="2400" dirty="0"/>
-              <a:t> (C4 Level </a:t>
-            </a:r>
-            <a:r>
-              <a:rPr sz="2400" dirty="0" smtClean="0"/>
-              <a:t>1)</a:t>
-            </a:r>
-            <a:r>
-              <a:rPr lang="ru-RU" sz="2400" dirty="0" smtClean="0"/>
-              <a:t>. Контекст. Пользователи и внешние системы</a:t>
-            </a:r>
-            <a:endParaRPr sz="2400" dirty="0"/>
+              <a:rPr lang="ru-RU" sz="3600" dirty="0" smtClean="0"/>
+              <a:t>Контекст. </a:t>
+            </a:r>
+            <a:r>
+              <a:rPr lang="ru-RU" sz="3600" dirty="0" smtClean="0"/>
+              <a:t>Пользователи </a:t>
+            </a:r>
+            <a:r>
+              <a:rPr lang="ru-RU" sz="3600" dirty="0" smtClean="0"/>
+              <a:t>и внешние системы</a:t>
+            </a:r>
+            <a:endParaRPr sz="3600" dirty="0"/>
           </a:p>
         </p:txBody>
       </p:sp>
@@ -14334,8 +14433,8 @@
         </p:nvSpPr>
         <p:spPr>
           <a:xfrm>
-            <a:off x="929487" y="225681"/>
-            <a:ext cx="10698480" cy="954107"/>
+            <a:off x="2632032" y="198068"/>
+            <a:ext cx="6938514" cy="1077218"/>
           </a:xfrm>
           <a:prstGeom prst="rect">
             <a:avLst/>
@@ -14357,31 +14456,19 @@
               </a:defRPr>
             </a:pPr>
             <a:r>
-              <a:rPr dirty="0" err="1"/>
-              <a:t>Архитектура</a:t>
-            </a:r>
-            <a:r>
-              <a:rPr dirty="0"/>
-              <a:t> (C4 Level 2</a:t>
-            </a:r>
-            <a:r>
-              <a:rPr dirty="0" smtClean="0"/>
-              <a:t>)</a:t>
-            </a:r>
-            <a:r>
-              <a:rPr lang="ru-RU" dirty="0" smtClean="0"/>
-              <a:t>. </a:t>
-            </a:r>
-            <a:r>
-              <a:rPr lang="ru-RU" dirty="0"/>
-              <a:t>Контейнеры: </a:t>
-            </a:r>
-            <a:r>
-              <a:rPr lang="en-US" dirty="0"/>
+              <a:rPr lang="ru-RU" sz="3600" dirty="0" smtClean="0"/>
+              <a:t>Контейнеры</a:t>
+            </a:r>
+            <a:r>
+              <a:rPr lang="ru-RU" sz="3600" dirty="0"/>
+              <a:t>: </a:t>
+            </a:r>
+            <a:r>
+              <a:rPr lang="en-US" sz="3600" dirty="0"/>
               <a:t>SPA → API → </a:t>
             </a:r>
             <a:r>
-              <a:rPr lang="ru-RU" dirty="0"/>
+              <a:rPr lang="ru-RU" sz="3600" dirty="0"/>
               <a:t>БД</a:t>
             </a:r>
           </a:p>
@@ -14450,7 +14537,7 @@
       </p:sp>
       <p:pic>
         <p:nvPicPr>
-          <p:cNvPr id="1026" name="Picture 2" descr="C:\Users\dulum\Desktop\ДИПЛОМ\MDMAgent\for_presentation\png\C4_Container.png"/>
+          <p:cNvPr id="4098" name="Picture 2" descr="C:\Users\dulum\Desktop\ДИПЛОМ\MDMAgent\for_presentation\png\C4_Container.png"/>
           <p:cNvPicPr>
             <a:picLocks noChangeAspect="1" noChangeArrowheads="1"/>
           </p:cNvPicPr>
@@ -14471,8 +14558,8 @@
         </p:blipFill>
         <p:spPr bwMode="auto">
           <a:xfrm>
-            <a:off x="10579" y="1159783"/>
-            <a:ext cx="12181421" cy="5243008"/>
+            <a:off x="95931" y="1145404"/>
+            <a:ext cx="11999832" cy="5164851"/>
           </a:xfrm>
           <a:prstGeom prst="rect">
             <a:avLst/>
@@ -14573,8 +14660,8 @@
         </p:nvSpPr>
         <p:spPr>
           <a:xfrm>
-            <a:off x="1571037" y="234613"/>
-            <a:ext cx="10698480" cy="954107"/>
+            <a:off x="2015795" y="193087"/>
+            <a:ext cx="8160103" cy="1077218"/>
           </a:xfrm>
           <a:prstGeom prst="rect">
             <a:avLst/>
@@ -14596,30 +14683,22 @@
               </a:defRPr>
             </a:pPr>
             <a:r>
-              <a:rPr dirty="0" err="1"/>
+              <a:rPr sz="3600" dirty="0" err="1" smtClean="0"/>
               <a:t>Архитектура</a:t>
             </a:r>
             <a:r>
-              <a:rPr dirty="0"/>
-              <a:t> (C4 Level 3</a:t>
-            </a:r>
-            <a:r>
-              <a:rPr dirty="0" smtClean="0"/>
-              <a:t>)</a:t>
-            </a:r>
-            <a:r>
-              <a:rPr lang="ru-RU" dirty="0" smtClean="0"/>
+              <a:rPr lang="ru-RU" sz="3600" dirty="0" smtClean="0"/>
               <a:t>. </a:t>
             </a:r>
             <a:r>
-              <a:rPr lang="ru-RU" dirty="0"/>
+              <a:rPr lang="ru-RU" sz="3600" dirty="0"/>
               <a:t>Компоненты </a:t>
             </a:r>
             <a:r>
-              <a:rPr lang="en-US" dirty="0" smtClean="0"/>
+              <a:rPr lang="en-US" sz="3600" dirty="0" smtClean="0"/>
               <a:t>Backend</a:t>
             </a:r>
-            <a:endParaRPr lang="en-US" dirty="0"/>
+            <a:endParaRPr lang="en-US" sz="3600" dirty="0"/>
           </a:p>
           <a:p>
             <a:pPr algn="l">
@@ -14634,9 +14713,59 @@
           </a:p>
         </p:txBody>
       </p:sp>
+      <p:sp>
+        <p:nvSpPr>
+          <p:cNvPr id="6" name="Прямоугольник 5"/>
+          <p:cNvSpPr/>
+          <p:nvPr/>
+        </p:nvSpPr>
+        <p:spPr>
+          <a:xfrm>
+            <a:off x="11046307" y="6408549"/>
+            <a:ext cx="686406" cy="369332"/>
+          </a:xfrm>
+          <a:prstGeom prst="rect">
+            <a:avLst/>
+          </a:prstGeom>
+        </p:spPr>
+        <p:txBody>
+          <a:bodyPr wrap="none">
+            <a:spAutoFit/>
+          </a:bodyPr>
+          <a:lstStyle/>
+          <a:p>
+            <a:fld id="{C1FF6DA9-008F-8B48-92A6-B652298478BF}" type="slidenum">
+              <a:rPr lang="en-US" b="1" smtClean="0">
+                <a:latin typeface="Segoe UI" panose="020B0502040204020203" pitchFamily="34" charset="0"/>
+                <a:cs typeface="Segoe UI" panose="020B0502040204020203" pitchFamily="34" charset="0"/>
+              </a:rPr>
+              <a:pPr/>
+              <a:t>9</a:t>
+            </a:fld>
+            <a:r>
+              <a:rPr lang="en-US" b="1" dirty="0" smtClean="0">
+                <a:latin typeface="Segoe UI" panose="020B0502040204020203" pitchFamily="34" charset="0"/>
+                <a:cs typeface="Segoe UI" panose="020B0502040204020203" pitchFamily="34" charset="0"/>
+              </a:rPr>
+              <a:t>/2</a:t>
+            </a:r>
+            <a:r>
+              <a:rPr lang="ru-RU" b="1" dirty="0" smtClean="0">
+                <a:latin typeface="Segoe UI" panose="020B0502040204020203" pitchFamily="34" charset="0"/>
+                <a:cs typeface="Segoe UI" panose="020B0502040204020203" pitchFamily="34" charset="0"/>
+              </a:rPr>
+              <a:t>6</a:t>
+            </a:r>
+            <a:endParaRPr lang="en-US" b="1" dirty="0">
+              <a:latin typeface="Segoe UI" panose="020B0502040204020203" pitchFamily="34" charset="0"/>
+              <a:cs typeface="Segoe UI" panose="020B0502040204020203" pitchFamily="34" charset="0"/>
+            </a:endParaRPr>
+          </a:p>
+        </p:txBody>
+      </p:sp>
       <p:pic>
         <p:nvPicPr>
-          <p:cNvPr id="4098" name="Picture 2" descr="C:\Users\dulum\Desktop\ДИПЛОМ\MDMAgent\for_presentation\png\C4_Component.png"/>
+          <p:cNvPr id="5122" name="Picture 2" descr="C:\Users\dulum\Desktop\ДИПЛОМ\MDMAgent\for_presentation\png\C4_Component.png"/>
           <p:cNvPicPr>
             <a:picLocks noChangeAspect="1" noChangeArrowheads="1"/>
           </p:cNvPicPr>
@@ -14657,8 +14786,8 @@
         </p:blipFill>
         <p:spPr bwMode="auto">
           <a:xfrm>
-            <a:off x="304647" y="1302793"/>
-            <a:ext cx="11582400" cy="5114925"/>
+            <a:off x="304644" y="1225593"/>
+            <a:ext cx="11771271" cy="5198332"/>
           </a:xfrm>
           <a:prstGeom prst="rect">
             <a:avLst/>
@@ -14675,56 +14804,6 @@
           </a:extLst>
         </p:spPr>
       </p:pic>
-      <p:sp>
-        <p:nvSpPr>
-          <p:cNvPr id="6" name="Прямоугольник 5"/>
-          <p:cNvSpPr/>
-          <p:nvPr/>
-        </p:nvSpPr>
-        <p:spPr>
-          <a:xfrm>
-            <a:off x="10840870" y="6054593"/>
-            <a:ext cx="686406" cy="369332"/>
-          </a:xfrm>
-          <a:prstGeom prst="rect">
-            <a:avLst/>
-          </a:prstGeom>
-        </p:spPr>
-        <p:txBody>
-          <a:bodyPr wrap="none">
-            <a:spAutoFit/>
-          </a:bodyPr>
-          <a:lstStyle/>
-          <a:p>
-            <a:fld id="{C1FF6DA9-008F-8B48-92A6-B652298478BF}" type="slidenum">
-              <a:rPr lang="en-US" b="1" smtClean="0">
-                <a:latin typeface="Segoe UI" panose="020B0502040204020203" pitchFamily="34" charset="0"/>
-                <a:cs typeface="Segoe UI" panose="020B0502040204020203" pitchFamily="34" charset="0"/>
-              </a:rPr>
-              <a:pPr/>
-              <a:t>9</a:t>
-            </a:fld>
-            <a:r>
-              <a:rPr lang="en-US" b="1" dirty="0" smtClean="0">
-                <a:latin typeface="Segoe UI" panose="020B0502040204020203" pitchFamily="34" charset="0"/>
-                <a:cs typeface="Segoe UI" panose="020B0502040204020203" pitchFamily="34" charset="0"/>
-              </a:rPr>
-              <a:t>/2</a:t>
-            </a:r>
-            <a:r>
-              <a:rPr lang="ru-RU" b="1" dirty="0" smtClean="0">
-                <a:latin typeface="Segoe UI" panose="020B0502040204020203" pitchFamily="34" charset="0"/>
-                <a:cs typeface="Segoe UI" panose="020B0502040204020203" pitchFamily="34" charset="0"/>
-              </a:rPr>
-              <a:t>6</a:t>
-            </a:r>
-            <a:endParaRPr lang="en-US" b="1" dirty="0">
-              <a:latin typeface="Segoe UI" panose="020B0502040204020203" pitchFamily="34" charset="0"/>
-              <a:cs typeface="Segoe UI" panose="020B0502040204020203" pitchFamily="34" charset="0"/>
-            </a:endParaRPr>
-          </a:p>
-        </p:txBody>
-      </p:sp>
     </p:spTree>
   </p:cSld>
   <p:clrMapOvr>
